--- a/docs/pptx/entire/ritu-entire-linsubhr-sens-aki2_10pct.pptx
+++ b/docs/pptx/entire/ritu-entire-linsubhr-sens-aki2_10pct.pptx
@@ -3389,612 +3389,612 @@
           </p:nvSpPr>
           <p:spPr>
             <a:xfrm>
-              <a:off x="1172049" y="2816889"/>
-              <a:ext cx="7090630" cy="2572549"/>
+              <a:off x="1172049" y="2807021"/>
+              <a:ext cx="7090630" cy="2583221"/>
             </a:xfrm>
             <a:custGeom>
               <a:avLst/>
               <a:pathLst>
-                <a:path w="7090630" h="2572549">
+                <a:path w="7090630" h="2583221">
                   <a:moveTo>
                     <a:pt x="0" y="0"/>
                   </a:moveTo>
                   <a:lnTo>
-                    <a:pt x="71622" y="76231"/>
-                  </a:lnTo>
-                  <a:lnTo>
-                    <a:pt x="143245" y="150341"/>
-                  </a:lnTo>
-                  <a:lnTo>
-                    <a:pt x="214867" y="222390"/>
-                  </a:lnTo>
-                  <a:lnTo>
-                    <a:pt x="286490" y="292435"/>
-                  </a:lnTo>
-                  <a:lnTo>
-                    <a:pt x="358112" y="360531"/>
-                  </a:lnTo>
-                  <a:lnTo>
-                    <a:pt x="429735" y="426733"/>
-                  </a:lnTo>
-                  <a:lnTo>
-                    <a:pt x="501357" y="491093"/>
-                  </a:lnTo>
-                  <a:lnTo>
-                    <a:pt x="572980" y="553663"/>
-                  </a:lnTo>
-                  <a:lnTo>
-                    <a:pt x="644602" y="614493"/>
-                  </a:lnTo>
-                  <a:lnTo>
-                    <a:pt x="716225" y="673630"/>
-                  </a:lnTo>
-                  <a:lnTo>
-                    <a:pt x="787847" y="731122"/>
-                  </a:lnTo>
-                  <a:lnTo>
-                    <a:pt x="859470" y="787015"/>
-                  </a:lnTo>
-                  <a:lnTo>
-                    <a:pt x="931092" y="841353"/>
-                  </a:lnTo>
-                  <a:lnTo>
-                    <a:pt x="1002715" y="894179"/>
-                  </a:lnTo>
-                  <a:lnTo>
-                    <a:pt x="1074337" y="945536"/>
-                  </a:lnTo>
-                  <a:lnTo>
-                    <a:pt x="1145960" y="995464"/>
-                  </a:lnTo>
-                  <a:lnTo>
-                    <a:pt x="1217582" y="1044004"/>
-                  </a:lnTo>
-                  <a:lnTo>
-                    <a:pt x="1289205" y="1091193"/>
-                  </a:lnTo>
-                  <a:lnTo>
-                    <a:pt x="1360827" y="1137069"/>
-                  </a:lnTo>
-                  <a:lnTo>
-                    <a:pt x="1432450" y="1181669"/>
-                  </a:lnTo>
-                  <a:lnTo>
-                    <a:pt x="1504073" y="1225029"/>
-                  </a:lnTo>
-                  <a:lnTo>
-                    <a:pt x="1575695" y="1267182"/>
-                  </a:lnTo>
-                  <a:lnTo>
-                    <a:pt x="1647318" y="1308163"/>
-                  </a:lnTo>
-                  <a:lnTo>
-                    <a:pt x="1718940" y="1348004"/>
-                  </a:lnTo>
-                  <a:lnTo>
-                    <a:pt x="1790563" y="1386736"/>
-                  </a:lnTo>
-                  <a:lnTo>
-                    <a:pt x="1862185" y="1424391"/>
-                  </a:lnTo>
-                  <a:lnTo>
-                    <a:pt x="1933808" y="1460999"/>
-                  </a:lnTo>
-                  <a:lnTo>
-                    <a:pt x="2005430" y="1496588"/>
-                  </a:lnTo>
-                  <a:lnTo>
-                    <a:pt x="2077053" y="1531187"/>
-                  </a:lnTo>
-                  <a:lnTo>
-                    <a:pt x="2148675" y="1564824"/>
-                  </a:lnTo>
-                  <a:lnTo>
-                    <a:pt x="2220298" y="1597525"/>
-                  </a:lnTo>
-                  <a:lnTo>
-                    <a:pt x="2291920" y="1629316"/>
-                  </a:lnTo>
-                  <a:lnTo>
-                    <a:pt x="2363543" y="1660223"/>
-                  </a:lnTo>
-                  <a:lnTo>
-                    <a:pt x="2435165" y="1690270"/>
-                  </a:lnTo>
-                  <a:lnTo>
-                    <a:pt x="2506788" y="1719482"/>
-                  </a:lnTo>
-                  <a:lnTo>
-                    <a:pt x="2578410" y="1747880"/>
-                  </a:lnTo>
-                  <a:lnTo>
-                    <a:pt x="2650033" y="1775489"/>
-                  </a:lnTo>
-                  <a:lnTo>
-                    <a:pt x="2721655" y="1802330"/>
-                  </a:lnTo>
-                  <a:lnTo>
-                    <a:pt x="2793278" y="1828424"/>
-                  </a:lnTo>
-                  <a:lnTo>
-                    <a:pt x="2864901" y="1853792"/>
-                  </a:lnTo>
-                  <a:lnTo>
-                    <a:pt x="2936523" y="1878454"/>
-                  </a:lnTo>
-                  <a:lnTo>
-                    <a:pt x="3008146" y="1902431"/>
-                  </a:lnTo>
-                  <a:lnTo>
-                    <a:pt x="3079768" y="1914490"/>
-                  </a:lnTo>
-                  <a:lnTo>
-                    <a:pt x="3151391" y="1920074"/>
-                  </a:lnTo>
-                  <a:lnTo>
-                    <a:pt x="3223013" y="1925620"/>
-                  </a:lnTo>
-                  <a:lnTo>
-                    <a:pt x="3294636" y="1931128"/>
-                  </a:lnTo>
-                  <a:lnTo>
-                    <a:pt x="3366258" y="1936599"/>
-                  </a:lnTo>
-                  <a:lnTo>
-                    <a:pt x="3437881" y="1942033"/>
-                  </a:lnTo>
-                  <a:lnTo>
-                    <a:pt x="3509503" y="1947431"/>
-                  </a:lnTo>
-                  <a:lnTo>
-                    <a:pt x="3581126" y="1952792"/>
-                  </a:lnTo>
-                  <a:lnTo>
-                    <a:pt x="3652748" y="1958116"/>
-                  </a:lnTo>
-                  <a:lnTo>
-                    <a:pt x="3724371" y="1963405"/>
-                  </a:lnTo>
-                  <a:lnTo>
-                    <a:pt x="3795993" y="1968658"/>
-                  </a:lnTo>
-                  <a:lnTo>
-                    <a:pt x="3867616" y="1973875"/>
-                  </a:lnTo>
-                  <a:lnTo>
-                    <a:pt x="3939238" y="1979057"/>
-                  </a:lnTo>
-                  <a:lnTo>
-                    <a:pt x="4010861" y="1984204"/>
-                  </a:lnTo>
-                  <a:lnTo>
-                    <a:pt x="4082483" y="1989316"/>
-                  </a:lnTo>
-                  <a:lnTo>
-                    <a:pt x="4154106" y="1994394"/>
-                  </a:lnTo>
-                  <a:lnTo>
-                    <a:pt x="4225729" y="1999437"/>
-                  </a:lnTo>
-                  <a:lnTo>
-                    <a:pt x="4297351" y="2004447"/>
-                  </a:lnTo>
-                  <a:lnTo>
-                    <a:pt x="4368974" y="2009422"/>
-                  </a:lnTo>
-                  <a:lnTo>
-                    <a:pt x="4440596" y="2014364"/>
-                  </a:lnTo>
-                  <a:lnTo>
-                    <a:pt x="4512219" y="2019272"/>
-                  </a:lnTo>
-                  <a:lnTo>
-                    <a:pt x="4583841" y="2024147"/>
-                  </a:lnTo>
-                  <a:lnTo>
-                    <a:pt x="4655464" y="2028990"/>
-                  </a:lnTo>
-                  <a:lnTo>
-                    <a:pt x="4727086" y="2033799"/>
-                  </a:lnTo>
-                  <a:lnTo>
-                    <a:pt x="4798709" y="2038576"/>
-                  </a:lnTo>
-                  <a:lnTo>
-                    <a:pt x="4870331" y="2043321"/>
-                  </a:lnTo>
-                  <a:lnTo>
-                    <a:pt x="4941954" y="2048033"/>
-                  </a:lnTo>
-                  <a:lnTo>
-                    <a:pt x="5013576" y="2052714"/>
-                  </a:lnTo>
-                  <a:lnTo>
-                    <a:pt x="5085199" y="2057363"/>
-                  </a:lnTo>
-                  <a:lnTo>
-                    <a:pt x="5156821" y="2061981"/>
-                  </a:lnTo>
-                  <a:lnTo>
-                    <a:pt x="5228444" y="2066567"/>
-                  </a:lnTo>
-                  <a:lnTo>
-                    <a:pt x="5300066" y="2071122"/>
-                  </a:lnTo>
-                  <a:lnTo>
-                    <a:pt x="5371689" y="2075647"/>
-                  </a:lnTo>
-                  <a:lnTo>
-                    <a:pt x="5443311" y="2080141"/>
-                  </a:lnTo>
-                  <a:lnTo>
-                    <a:pt x="5514934" y="2084605"/>
-                  </a:lnTo>
-                  <a:lnTo>
-                    <a:pt x="5586557" y="2089038"/>
-                  </a:lnTo>
-                  <a:lnTo>
-                    <a:pt x="5658179" y="2093442"/>
-                  </a:lnTo>
-                  <a:lnTo>
-                    <a:pt x="5729802" y="2097815"/>
-                  </a:lnTo>
-                  <a:lnTo>
-                    <a:pt x="5801424" y="2102159"/>
-                  </a:lnTo>
-                  <a:lnTo>
-                    <a:pt x="5873047" y="2106474"/>
-                  </a:lnTo>
-                  <a:lnTo>
-                    <a:pt x="5944669" y="2110760"/>
-                  </a:lnTo>
-                  <a:lnTo>
-                    <a:pt x="6016292" y="2115016"/>
-                  </a:lnTo>
-                  <a:lnTo>
-                    <a:pt x="6087914" y="2119244"/>
-                  </a:lnTo>
-                  <a:lnTo>
-                    <a:pt x="6159537" y="2123443"/>
-                  </a:lnTo>
-                  <a:lnTo>
-                    <a:pt x="6231159" y="2127614"/>
-                  </a:lnTo>
-                  <a:lnTo>
-                    <a:pt x="6302782" y="2131757"/>
-                  </a:lnTo>
-                  <a:lnTo>
-                    <a:pt x="6374404" y="2135872"/>
-                  </a:lnTo>
-                  <a:lnTo>
-                    <a:pt x="6446027" y="2139959"/>
-                  </a:lnTo>
-                  <a:lnTo>
-                    <a:pt x="6517649" y="2144018"/>
-                  </a:lnTo>
-                  <a:lnTo>
-                    <a:pt x="6589272" y="2148050"/>
-                  </a:lnTo>
-                  <a:lnTo>
-                    <a:pt x="6660894" y="2152054"/>
-                  </a:lnTo>
-                  <a:lnTo>
-                    <a:pt x="6732517" y="2156031"/>
-                  </a:lnTo>
-                  <a:lnTo>
-                    <a:pt x="6804139" y="2159982"/>
-                  </a:lnTo>
-                  <a:lnTo>
-                    <a:pt x="6875762" y="2163906"/>
-                  </a:lnTo>
-                  <a:lnTo>
-                    <a:pt x="6947385" y="2167803"/>
-                  </a:lnTo>
-                  <a:lnTo>
-                    <a:pt x="7019007" y="2171674"/>
-                  </a:lnTo>
-                  <a:lnTo>
-                    <a:pt x="7090630" y="2175519"/>
-                  </a:lnTo>
-                  <a:lnTo>
-                    <a:pt x="7090630" y="2572549"/>
-                  </a:lnTo>
-                  <a:lnTo>
-                    <a:pt x="7019007" y="2567747"/>
-                  </a:lnTo>
-                  <a:lnTo>
-                    <a:pt x="6947385" y="2562808"/>
-                  </a:lnTo>
-                  <a:lnTo>
-                    <a:pt x="6875762" y="2557728"/>
-                  </a:lnTo>
-                  <a:lnTo>
-                    <a:pt x="6804139" y="2552502"/>
-                  </a:lnTo>
-                  <a:lnTo>
-                    <a:pt x="6732517" y="2547126"/>
-                  </a:lnTo>
-                  <a:lnTo>
-                    <a:pt x="6660894" y="2541597"/>
-                  </a:lnTo>
-                  <a:lnTo>
-                    <a:pt x="6589272" y="2535910"/>
-                  </a:lnTo>
-                  <a:lnTo>
-                    <a:pt x="6517649" y="2530060"/>
-                  </a:lnTo>
-                  <a:lnTo>
-                    <a:pt x="6446027" y="2524042"/>
-                  </a:lnTo>
-                  <a:lnTo>
-                    <a:pt x="6374404" y="2517853"/>
-                  </a:lnTo>
-                  <a:lnTo>
-                    <a:pt x="6302782" y="2511486"/>
-                  </a:lnTo>
-                  <a:lnTo>
-                    <a:pt x="6231159" y="2504937"/>
-                  </a:lnTo>
-                  <a:lnTo>
-                    <a:pt x="6159537" y="2498200"/>
-                  </a:lnTo>
-                  <a:lnTo>
-                    <a:pt x="6087914" y="2491271"/>
-                  </a:lnTo>
-                  <a:lnTo>
-                    <a:pt x="6016292" y="2484144"/>
-                  </a:lnTo>
-                  <a:lnTo>
-                    <a:pt x="5944669" y="2476812"/>
-                  </a:lnTo>
-                  <a:lnTo>
-                    <a:pt x="5873047" y="2469271"/>
-                  </a:lnTo>
-                  <a:lnTo>
-                    <a:pt x="5801424" y="2461514"/>
-                  </a:lnTo>
-                  <a:lnTo>
-                    <a:pt x="5729802" y="2453535"/>
-                  </a:lnTo>
-                  <a:lnTo>
-                    <a:pt x="5658179" y="2445328"/>
-                  </a:lnTo>
-                  <a:lnTo>
-                    <a:pt x="5586557" y="2436886"/>
-                  </a:lnTo>
-                  <a:lnTo>
-                    <a:pt x="5514934" y="2428203"/>
-                  </a:lnTo>
-                  <a:lnTo>
-                    <a:pt x="5443311" y="2419271"/>
-                  </a:lnTo>
-                  <a:lnTo>
-                    <a:pt x="5371689" y="2410083"/>
-                  </a:lnTo>
-                  <a:lnTo>
-                    <a:pt x="5300066" y="2400633"/>
-                  </a:lnTo>
-                  <a:lnTo>
-                    <a:pt x="5228444" y="2390912"/>
-                  </a:lnTo>
-                  <a:lnTo>
-                    <a:pt x="5156821" y="2380913"/>
-                  </a:lnTo>
-                  <a:lnTo>
-                    <a:pt x="5085199" y="2370627"/>
-                  </a:lnTo>
-                  <a:lnTo>
-                    <a:pt x="5013576" y="2360048"/>
-                  </a:lnTo>
-                  <a:lnTo>
-                    <a:pt x="4941954" y="2349166"/>
-                  </a:lnTo>
-                  <a:lnTo>
-                    <a:pt x="4870331" y="2337972"/>
-                  </a:lnTo>
-                  <a:lnTo>
-                    <a:pt x="4798709" y="2326458"/>
-                  </a:lnTo>
-                  <a:lnTo>
-                    <a:pt x="4727086" y="2314615"/>
-                  </a:lnTo>
-                  <a:lnTo>
-                    <a:pt x="4655464" y="2302432"/>
-                  </a:lnTo>
-                  <a:lnTo>
-                    <a:pt x="4583841" y="2289902"/>
-                  </a:lnTo>
-                  <a:lnTo>
-                    <a:pt x="4512219" y="2277012"/>
-                  </a:lnTo>
-                  <a:lnTo>
-                    <a:pt x="4440596" y="2263754"/>
-                  </a:lnTo>
-                  <a:lnTo>
-                    <a:pt x="4368974" y="2250117"/>
-                  </a:lnTo>
-                  <a:lnTo>
-                    <a:pt x="4297351" y="2236089"/>
-                  </a:lnTo>
-                  <a:lnTo>
-                    <a:pt x="4225729" y="2221660"/>
-                  </a:lnTo>
-                  <a:lnTo>
-                    <a:pt x="4154106" y="2206818"/>
-                  </a:lnTo>
-                  <a:lnTo>
-                    <a:pt x="4082483" y="2191551"/>
-                  </a:lnTo>
-                  <a:lnTo>
-                    <a:pt x="4010861" y="2175847"/>
-                  </a:lnTo>
-                  <a:lnTo>
-                    <a:pt x="3939238" y="2159694"/>
-                  </a:lnTo>
-                  <a:lnTo>
-                    <a:pt x="3867616" y="2143079"/>
-                  </a:lnTo>
-                  <a:lnTo>
-                    <a:pt x="3795993" y="2125989"/>
-                  </a:lnTo>
-                  <a:lnTo>
-                    <a:pt x="3724371" y="2108409"/>
-                  </a:lnTo>
-                  <a:lnTo>
-                    <a:pt x="3652748" y="2090326"/>
-                  </a:lnTo>
-                  <a:lnTo>
-                    <a:pt x="3581126" y="2071726"/>
-                  </a:lnTo>
-                  <a:lnTo>
-                    <a:pt x="3509503" y="2052594"/>
-                  </a:lnTo>
-                  <a:lnTo>
-                    <a:pt x="3437881" y="2032915"/>
-                  </a:lnTo>
-                  <a:lnTo>
-                    <a:pt x="3366258" y="2012672"/>
-                  </a:lnTo>
-                  <a:lnTo>
-                    <a:pt x="3294636" y="1991850"/>
-                  </a:lnTo>
-                  <a:lnTo>
-                    <a:pt x="3223013" y="1970432"/>
-                  </a:lnTo>
-                  <a:lnTo>
-                    <a:pt x="3151391" y="1948401"/>
-                  </a:lnTo>
-                  <a:lnTo>
-                    <a:pt x="3079768" y="1925740"/>
-                  </a:lnTo>
-                  <a:lnTo>
-                    <a:pt x="3008146" y="1908869"/>
-                  </a:lnTo>
-                  <a:lnTo>
-                    <a:pt x="2936523" y="1903209"/>
-                  </a:lnTo>
-                  <a:lnTo>
-                    <a:pt x="2864901" y="1897511"/>
-                  </a:lnTo>
-                  <a:lnTo>
-                    <a:pt x="2793278" y="1891774"/>
-                  </a:lnTo>
-                  <a:lnTo>
-                    <a:pt x="2721655" y="1885997"/>
-                  </a:lnTo>
-                  <a:lnTo>
-                    <a:pt x="2650033" y="1880182"/>
-                  </a:lnTo>
-                  <a:lnTo>
-                    <a:pt x="2578410" y="1874327"/>
-                  </a:lnTo>
-                  <a:lnTo>
-                    <a:pt x="2506788" y="1868432"/>
-                  </a:lnTo>
-                  <a:lnTo>
-                    <a:pt x="2435165" y="1862497"/>
-                  </a:lnTo>
-                  <a:lnTo>
-                    <a:pt x="2363543" y="1856521"/>
-                  </a:lnTo>
-                  <a:lnTo>
-                    <a:pt x="2291920" y="1850505"/>
-                  </a:lnTo>
-                  <a:lnTo>
-                    <a:pt x="2220298" y="1844448"/>
-                  </a:lnTo>
-                  <a:lnTo>
-                    <a:pt x="2148675" y="1838350"/>
-                  </a:lnTo>
-                  <a:lnTo>
-                    <a:pt x="2077053" y="1832210"/>
-                  </a:lnTo>
-                  <a:lnTo>
-                    <a:pt x="2005430" y="1826028"/>
-                  </a:lnTo>
-                  <a:lnTo>
-                    <a:pt x="1933808" y="1819804"/>
-                  </a:lnTo>
-                  <a:lnTo>
-                    <a:pt x="1862185" y="1813538"/>
-                  </a:lnTo>
-                  <a:lnTo>
-                    <a:pt x="1790563" y="1807230"/>
-                  </a:lnTo>
-                  <a:lnTo>
-                    <a:pt x="1718940" y="1800878"/>
-                  </a:lnTo>
-                  <a:lnTo>
-                    <a:pt x="1647318" y="1794483"/>
-                  </a:lnTo>
-                  <a:lnTo>
-                    <a:pt x="1575695" y="1788044"/>
-                  </a:lnTo>
-                  <a:lnTo>
-                    <a:pt x="1504073" y="1781562"/>
-                  </a:lnTo>
-                  <a:lnTo>
-                    <a:pt x="1432450" y="1775036"/>
-                  </a:lnTo>
-                  <a:lnTo>
-                    <a:pt x="1360827" y="1768465"/>
-                  </a:lnTo>
-                  <a:lnTo>
-                    <a:pt x="1289205" y="1761849"/>
-                  </a:lnTo>
-                  <a:lnTo>
-                    <a:pt x="1217582" y="1755189"/>
-                  </a:lnTo>
-                  <a:lnTo>
-                    <a:pt x="1145960" y="1748483"/>
-                  </a:lnTo>
-                  <a:lnTo>
-                    <a:pt x="1074337" y="1741731"/>
-                  </a:lnTo>
-                  <a:lnTo>
-                    <a:pt x="1002715" y="1734934"/>
-                  </a:lnTo>
-                  <a:lnTo>
-                    <a:pt x="931092" y="1728090"/>
-                  </a:lnTo>
-                  <a:lnTo>
-                    <a:pt x="859470" y="1721200"/>
-                  </a:lnTo>
-                  <a:lnTo>
-                    <a:pt x="787847" y="1714262"/>
-                  </a:lnTo>
-                  <a:lnTo>
-                    <a:pt x="716225" y="1707278"/>
-                  </a:lnTo>
-                  <a:lnTo>
-                    <a:pt x="644602" y="1700246"/>
-                  </a:lnTo>
-                  <a:lnTo>
-                    <a:pt x="572980" y="1693166"/>
-                  </a:lnTo>
-                  <a:lnTo>
-                    <a:pt x="501357" y="1686038"/>
-                  </a:lnTo>
-                  <a:lnTo>
-                    <a:pt x="429735" y="1678861"/>
-                  </a:lnTo>
-                  <a:lnTo>
-                    <a:pt x="358112" y="1671636"/>
-                  </a:lnTo>
-                  <a:lnTo>
-                    <a:pt x="286490" y="1664361"/>
-                  </a:lnTo>
-                  <a:lnTo>
-                    <a:pt x="214867" y="1657037"/>
-                  </a:lnTo>
-                  <a:lnTo>
-                    <a:pt x="143245" y="1649663"/>
-                  </a:lnTo>
-                  <a:lnTo>
-                    <a:pt x="71622" y="1642239"/>
-                  </a:lnTo>
-                  <a:lnTo>
-                    <a:pt x="0" y="1634764"/>
+                    <a:pt x="71622" y="76732"/>
+                  </a:lnTo>
+                  <a:lnTo>
+                    <a:pt x="143245" y="151324"/>
+                  </a:lnTo>
+                  <a:lnTo>
+                    <a:pt x="214867" y="223834"/>
+                  </a:lnTo>
+                  <a:lnTo>
+                    <a:pt x="286490" y="294322"/>
+                  </a:lnTo>
+                  <a:lnTo>
+                    <a:pt x="358112" y="362842"/>
+                  </a:lnTo>
+                  <a:lnTo>
+                    <a:pt x="429735" y="429451"/>
+                  </a:lnTo>
+                  <a:lnTo>
+                    <a:pt x="501357" y="494202"/>
+                  </a:lnTo>
+                  <a:lnTo>
+                    <a:pt x="572980" y="557146"/>
+                  </a:lnTo>
+                  <a:lnTo>
+                    <a:pt x="644602" y="618334"/>
+                  </a:lnTo>
+                  <a:lnTo>
+                    <a:pt x="716225" y="677815"/>
+                  </a:lnTo>
+                  <a:lnTo>
+                    <a:pt x="787847" y="735636"/>
+                  </a:lnTo>
+                  <a:lnTo>
+                    <a:pt x="859470" y="791844"/>
+                  </a:lnTo>
+                  <a:lnTo>
+                    <a:pt x="931092" y="846484"/>
+                  </a:lnTo>
+                  <a:lnTo>
+                    <a:pt x="1002715" y="899599"/>
+                  </a:lnTo>
+                  <a:lnTo>
+                    <a:pt x="1074337" y="951232"/>
+                  </a:lnTo>
+                  <a:lnTo>
+                    <a:pt x="1145960" y="1001425"/>
+                  </a:lnTo>
+                  <a:lnTo>
+                    <a:pt x="1217582" y="1050217"/>
+                  </a:lnTo>
+                  <a:lnTo>
+                    <a:pt x="1289205" y="1097648"/>
+                  </a:lnTo>
+                  <a:lnTo>
+                    <a:pt x="1360827" y="1143756"/>
+                  </a:lnTo>
+                  <a:lnTo>
+                    <a:pt x="1432450" y="1188577"/>
+                  </a:lnTo>
+                  <a:lnTo>
+                    <a:pt x="1504073" y="1232148"/>
+                  </a:lnTo>
+                  <a:lnTo>
+                    <a:pt x="1575695" y="1274503"/>
+                  </a:lnTo>
+                  <a:lnTo>
+                    <a:pt x="1647318" y="1315676"/>
+                  </a:lnTo>
+                  <a:lnTo>
+                    <a:pt x="1718940" y="1355701"/>
+                  </a:lnTo>
+                  <a:lnTo>
+                    <a:pt x="1790563" y="1394609"/>
+                  </a:lnTo>
+                  <a:lnTo>
+                    <a:pt x="1862185" y="1432431"/>
+                  </a:lnTo>
+                  <a:lnTo>
+                    <a:pt x="1933808" y="1469198"/>
+                  </a:lnTo>
+                  <a:lnTo>
+                    <a:pt x="2005430" y="1504939"/>
+                  </a:lnTo>
+                  <a:lnTo>
+                    <a:pt x="2077053" y="1539683"/>
+                  </a:lnTo>
+                  <a:lnTo>
+                    <a:pt x="2148675" y="1573458"/>
+                  </a:lnTo>
+                  <a:lnTo>
+                    <a:pt x="2220298" y="1606290"/>
+                  </a:lnTo>
+                  <a:lnTo>
+                    <a:pt x="2291920" y="1638207"/>
+                  </a:lnTo>
+                  <a:lnTo>
+                    <a:pt x="2363543" y="1669233"/>
+                  </a:lnTo>
+                  <a:lnTo>
+                    <a:pt x="2435165" y="1699393"/>
+                  </a:lnTo>
+                  <a:lnTo>
+                    <a:pt x="2506788" y="1728712"/>
+                  </a:lnTo>
+                  <a:lnTo>
+                    <a:pt x="2578410" y="1757212"/>
+                  </a:lnTo>
+                  <a:lnTo>
+                    <a:pt x="2650033" y="1784918"/>
+                  </a:lnTo>
+                  <a:lnTo>
+                    <a:pt x="2721655" y="1811850"/>
+                  </a:lnTo>
+                  <a:lnTo>
+                    <a:pt x="2793278" y="1838031"/>
+                  </a:lnTo>
+                  <a:lnTo>
+                    <a:pt x="2864901" y="1863482"/>
+                  </a:lnTo>
+                  <a:lnTo>
+                    <a:pt x="2936523" y="1888223"/>
+                  </a:lnTo>
+                  <a:lnTo>
+                    <a:pt x="3008146" y="1912273"/>
+                  </a:lnTo>
+                  <a:lnTo>
+                    <a:pt x="3079768" y="1924425"/>
+                  </a:lnTo>
+                  <a:lnTo>
+                    <a:pt x="3151391" y="1930111"/>
+                  </a:lnTo>
+                  <a:lnTo>
+                    <a:pt x="3223013" y="1935758"/>
+                  </a:lnTo>
+                  <a:lnTo>
+                    <a:pt x="3294636" y="1941366"/>
+                  </a:lnTo>
+                  <a:lnTo>
+                    <a:pt x="3366258" y="1946936"/>
+                  </a:lnTo>
+                  <a:lnTo>
+                    <a:pt x="3437881" y="1952467"/>
+                  </a:lnTo>
+                  <a:lnTo>
+                    <a:pt x="3509503" y="1957961"/>
+                  </a:lnTo>
+                  <a:lnTo>
+                    <a:pt x="3581126" y="1963416"/>
+                  </a:lnTo>
+                  <a:lnTo>
+                    <a:pt x="3652748" y="1968834"/>
+                  </a:lnTo>
+                  <a:lnTo>
+                    <a:pt x="3724371" y="1974214"/>
+                  </a:lnTo>
+                  <a:lnTo>
+                    <a:pt x="3795993" y="1979558"/>
+                  </a:lnTo>
+                  <a:lnTo>
+                    <a:pt x="3867616" y="1984864"/>
+                  </a:lnTo>
+                  <a:lnTo>
+                    <a:pt x="3939238" y="1990135"/>
+                  </a:lnTo>
+                  <a:lnTo>
+                    <a:pt x="4010861" y="1995368"/>
+                  </a:lnTo>
+                  <a:lnTo>
+                    <a:pt x="4082483" y="2000566"/>
+                  </a:lnTo>
+                  <a:lnTo>
+                    <a:pt x="4154106" y="2005728"/>
+                  </a:lnTo>
+                  <a:lnTo>
+                    <a:pt x="4225729" y="2010855"/>
+                  </a:lnTo>
+                  <a:lnTo>
+                    <a:pt x="4297351" y="2015946"/>
+                  </a:lnTo>
+                  <a:lnTo>
+                    <a:pt x="4368974" y="2021002"/>
+                  </a:lnTo>
+                  <a:lnTo>
+                    <a:pt x="4440596" y="2026023"/>
+                  </a:lnTo>
+                  <a:lnTo>
+                    <a:pt x="4512219" y="2031010"/>
+                  </a:lnTo>
+                  <a:lnTo>
+                    <a:pt x="4583841" y="2035962"/>
+                  </a:lnTo>
+                  <a:lnTo>
+                    <a:pt x="4655464" y="2040881"/>
+                  </a:lnTo>
+                  <a:lnTo>
+                    <a:pt x="4727086" y="2045765"/>
+                  </a:lnTo>
+                  <a:lnTo>
+                    <a:pt x="4798709" y="2050616"/>
+                  </a:lnTo>
+                  <a:lnTo>
+                    <a:pt x="4870331" y="2055433"/>
+                  </a:lnTo>
+                  <a:lnTo>
+                    <a:pt x="4941954" y="2060218"/>
+                  </a:lnTo>
+                  <a:lnTo>
+                    <a:pt x="5013576" y="2064969"/>
+                  </a:lnTo>
+                  <a:lnTo>
+                    <a:pt x="5085199" y="2069687"/>
+                  </a:lnTo>
+                  <a:lnTo>
+                    <a:pt x="5156821" y="2074373"/>
+                  </a:lnTo>
+                  <a:lnTo>
+                    <a:pt x="5228444" y="2079027"/>
+                  </a:lnTo>
+                  <a:lnTo>
+                    <a:pt x="5300066" y="2083649"/>
+                  </a:lnTo>
+                  <a:lnTo>
+                    <a:pt x="5371689" y="2088239"/>
+                  </a:lnTo>
+                  <a:lnTo>
+                    <a:pt x="5443311" y="2092797"/>
+                  </a:lnTo>
+                  <a:lnTo>
+                    <a:pt x="5514934" y="2097324"/>
+                  </a:lnTo>
+                  <a:lnTo>
+                    <a:pt x="5586557" y="2101820"/>
+                  </a:lnTo>
+                  <a:lnTo>
+                    <a:pt x="5658179" y="2106285"/>
+                  </a:lnTo>
+                  <a:lnTo>
+                    <a:pt x="5729802" y="2110719"/>
+                  </a:lnTo>
+                  <a:lnTo>
+                    <a:pt x="5801424" y="2115122"/>
+                  </a:lnTo>
+                  <a:lnTo>
+                    <a:pt x="5873047" y="2119495"/>
+                  </a:lnTo>
+                  <a:lnTo>
+                    <a:pt x="5944669" y="2123839"/>
+                  </a:lnTo>
+                  <a:lnTo>
+                    <a:pt x="6016292" y="2128152"/>
+                  </a:lnTo>
+                  <a:lnTo>
+                    <a:pt x="6087914" y="2132435"/>
+                  </a:lnTo>
+                  <a:lnTo>
+                    <a:pt x="6159537" y="2136689"/>
+                  </a:lnTo>
+                  <a:lnTo>
+                    <a:pt x="6231159" y="2140914"/>
+                  </a:lnTo>
+                  <a:lnTo>
+                    <a:pt x="6302782" y="2145110"/>
+                  </a:lnTo>
+                  <a:lnTo>
+                    <a:pt x="6374404" y="2149276"/>
+                  </a:lnTo>
+                  <a:lnTo>
+                    <a:pt x="6446027" y="2153414"/>
+                  </a:lnTo>
+                  <a:lnTo>
+                    <a:pt x="6517649" y="2157524"/>
+                  </a:lnTo>
+                  <a:lnTo>
+                    <a:pt x="6589272" y="2161605"/>
+                  </a:lnTo>
+                  <a:lnTo>
+                    <a:pt x="6660894" y="2165658"/>
+                  </a:lnTo>
+                  <a:lnTo>
+                    <a:pt x="6732517" y="2169683"/>
+                  </a:lnTo>
+                  <a:lnTo>
+                    <a:pt x="6804139" y="2173681"/>
+                  </a:lnTo>
+                  <a:lnTo>
+                    <a:pt x="6875762" y="2177651"/>
+                  </a:lnTo>
+                  <a:lnTo>
+                    <a:pt x="6947385" y="2181594"/>
+                  </a:lnTo>
+                  <a:lnTo>
+                    <a:pt x="7019007" y="2185509"/>
+                  </a:lnTo>
+                  <a:lnTo>
+                    <a:pt x="7090630" y="2189398"/>
+                  </a:lnTo>
+                  <a:lnTo>
+                    <a:pt x="7090630" y="2583221"/>
+                  </a:lnTo>
+                  <a:lnTo>
+                    <a:pt x="7019007" y="2578428"/>
+                  </a:lnTo>
+                  <a:lnTo>
+                    <a:pt x="6947385" y="2573497"/>
+                  </a:lnTo>
+                  <a:lnTo>
+                    <a:pt x="6875762" y="2568425"/>
+                  </a:lnTo>
+                  <a:lnTo>
+                    <a:pt x="6804139" y="2563207"/>
+                  </a:lnTo>
+                  <a:lnTo>
+                    <a:pt x="6732517" y="2557839"/>
+                  </a:lnTo>
+                  <a:lnTo>
+                    <a:pt x="6660894" y="2552317"/>
+                  </a:lnTo>
+                  <a:lnTo>
+                    <a:pt x="6589272" y="2546637"/>
+                  </a:lnTo>
+                  <a:lnTo>
+                    <a:pt x="6517649" y="2540794"/>
+                  </a:lnTo>
+                  <a:lnTo>
+                    <a:pt x="6446027" y="2534783"/>
+                  </a:lnTo>
+                  <a:lnTo>
+                    <a:pt x="6374404" y="2528599"/>
+                  </a:lnTo>
+                  <a:lnTo>
+                    <a:pt x="6302782" y="2522238"/>
+                  </a:lnTo>
+                  <a:lnTo>
+                    <a:pt x="6231159" y="2515695"/>
+                  </a:lnTo>
+                  <a:lnTo>
+                    <a:pt x="6159537" y="2508963"/>
+                  </a:lnTo>
+                  <a:lnTo>
+                    <a:pt x="6087914" y="2502039"/>
+                  </a:lnTo>
+                  <a:lnTo>
+                    <a:pt x="6016292" y="2494915"/>
+                  </a:lnTo>
+                  <a:lnTo>
+                    <a:pt x="5944669" y="2487587"/>
+                  </a:lnTo>
+                  <a:lnTo>
+                    <a:pt x="5873047" y="2480049"/>
+                  </a:lnTo>
+                  <a:lnTo>
+                    <a:pt x="5801424" y="2472295"/>
+                  </a:lnTo>
+                  <a:lnTo>
+                    <a:pt x="5729802" y="2464318"/>
+                  </a:lnTo>
+                  <a:lnTo>
+                    <a:pt x="5658179" y="2456112"/>
+                  </a:lnTo>
+                  <a:lnTo>
+                    <a:pt x="5586557" y="2447670"/>
+                  </a:lnTo>
+                  <a:lnTo>
+                    <a:pt x="5514934" y="2438987"/>
+                  </a:lnTo>
+                  <a:lnTo>
+                    <a:pt x="5443311" y="2430054"/>
+                  </a:lnTo>
+                  <a:lnTo>
+                    <a:pt x="5371689" y="2420864"/>
+                  </a:lnTo>
+                  <a:lnTo>
+                    <a:pt x="5300066" y="2411411"/>
+                  </a:lnTo>
+                  <a:lnTo>
+                    <a:pt x="5228444" y="2401687"/>
+                  </a:lnTo>
+                  <a:lnTo>
+                    <a:pt x="5156821" y="2391683"/>
+                  </a:lnTo>
+                  <a:lnTo>
+                    <a:pt x="5085199" y="2381392"/>
+                  </a:lnTo>
+                  <a:lnTo>
+                    <a:pt x="5013576" y="2370806"/>
+                  </a:lnTo>
+                  <a:lnTo>
+                    <a:pt x="4941954" y="2359917"/>
+                  </a:lnTo>
+                  <a:lnTo>
+                    <a:pt x="4870331" y="2348714"/>
+                  </a:lnTo>
+                  <a:lnTo>
+                    <a:pt x="4798709" y="2337190"/>
+                  </a:lnTo>
+                  <a:lnTo>
+                    <a:pt x="4727086" y="2325336"/>
+                  </a:lnTo>
+                  <a:lnTo>
+                    <a:pt x="4655464" y="2313141"/>
+                  </a:lnTo>
+                  <a:lnTo>
+                    <a:pt x="4583841" y="2300596"/>
+                  </a:lnTo>
+                  <a:lnTo>
+                    <a:pt x="4512219" y="2287691"/>
+                  </a:lnTo>
+                  <a:lnTo>
+                    <a:pt x="4440596" y="2274415"/>
+                  </a:lnTo>
+                  <a:lnTo>
+                    <a:pt x="4368974" y="2260759"/>
+                  </a:lnTo>
+                  <a:lnTo>
+                    <a:pt x="4297351" y="2246711"/>
+                  </a:lnTo>
+                  <a:lnTo>
+                    <a:pt x="4225729" y="2232259"/>
+                  </a:lnTo>
+                  <a:lnTo>
+                    <a:pt x="4154106" y="2217393"/>
+                  </a:lnTo>
+                  <a:lnTo>
+                    <a:pt x="4082483" y="2202100"/>
+                  </a:lnTo>
+                  <a:lnTo>
+                    <a:pt x="4010861" y="2186368"/>
+                  </a:lnTo>
+                  <a:lnTo>
+                    <a:pt x="3939238" y="2170184"/>
+                  </a:lnTo>
+                  <a:lnTo>
+                    <a:pt x="3867616" y="2153537"/>
+                  </a:lnTo>
+                  <a:lnTo>
+                    <a:pt x="3795993" y="2136411"/>
+                  </a:lnTo>
+                  <a:lnTo>
+                    <a:pt x="3724371" y="2118794"/>
+                  </a:lnTo>
+                  <a:lnTo>
+                    <a:pt x="3652748" y="2100671"/>
+                  </a:lnTo>
+                  <a:lnTo>
+                    <a:pt x="3581126" y="2082028"/>
+                  </a:lnTo>
+                  <a:lnTo>
+                    <a:pt x="3509503" y="2062849"/>
+                  </a:lnTo>
+                  <a:lnTo>
+                    <a:pt x="3437881" y="2043121"/>
+                  </a:lnTo>
+                  <a:lnTo>
+                    <a:pt x="3366258" y="2022826"/>
+                  </a:lnTo>
+                  <a:lnTo>
+                    <a:pt x="3294636" y="2001949"/>
+                  </a:lnTo>
+                  <a:lnTo>
+                    <a:pt x="3223013" y="1980472"/>
+                  </a:lnTo>
+                  <a:lnTo>
+                    <a:pt x="3151391" y="1958379"/>
+                  </a:lnTo>
+                  <a:lnTo>
+                    <a:pt x="3079768" y="1935652"/>
+                  </a:lnTo>
+                  <a:lnTo>
+                    <a:pt x="3008146" y="1918699"/>
+                  </a:lnTo>
+                  <a:lnTo>
+                    <a:pt x="2936523" y="1912934"/>
+                  </a:lnTo>
+                  <a:lnTo>
+                    <a:pt x="2864901" y="1907128"/>
+                  </a:lnTo>
+                  <a:lnTo>
+                    <a:pt x="2793278" y="1901282"/>
+                  </a:lnTo>
+                  <a:lnTo>
+                    <a:pt x="2721655" y="1895396"/>
+                  </a:lnTo>
+                  <a:lnTo>
+                    <a:pt x="2650033" y="1889469"/>
+                  </a:lnTo>
+                  <a:lnTo>
+                    <a:pt x="2578410" y="1883501"/>
+                  </a:lnTo>
+                  <a:lnTo>
+                    <a:pt x="2506788" y="1877492"/>
+                  </a:lnTo>
+                  <a:lnTo>
+                    <a:pt x="2435165" y="1871441"/>
+                  </a:lnTo>
+                  <a:lnTo>
+                    <a:pt x="2363543" y="1865347"/>
+                  </a:lnTo>
+                  <a:lnTo>
+                    <a:pt x="2291920" y="1859212"/>
+                  </a:lnTo>
+                  <a:lnTo>
+                    <a:pt x="2220298" y="1853034"/>
+                  </a:lnTo>
+                  <a:lnTo>
+                    <a:pt x="2148675" y="1846813"/>
+                  </a:lnTo>
+                  <a:lnTo>
+                    <a:pt x="2077053" y="1840550"/>
+                  </a:lnTo>
+                  <a:lnTo>
+                    <a:pt x="2005430" y="1834242"/>
+                  </a:lnTo>
+                  <a:lnTo>
+                    <a:pt x="1933808" y="1827891"/>
+                  </a:lnTo>
+                  <a:lnTo>
+                    <a:pt x="1862185" y="1821496"/>
+                  </a:lnTo>
+                  <a:lnTo>
+                    <a:pt x="1790563" y="1815057"/>
+                  </a:lnTo>
+                  <a:lnTo>
+                    <a:pt x="1718940" y="1808573"/>
+                  </a:lnTo>
+                  <a:lnTo>
+                    <a:pt x="1647318" y="1802044"/>
+                  </a:lnTo>
+                  <a:lnTo>
+                    <a:pt x="1575695" y="1795470"/>
+                  </a:lnTo>
+                  <a:lnTo>
+                    <a:pt x="1504073" y="1788850"/>
+                  </a:lnTo>
+                  <a:lnTo>
+                    <a:pt x="1432450" y="1782184"/>
+                  </a:lnTo>
+                  <a:lnTo>
+                    <a:pt x="1360827" y="1775472"/>
+                  </a:lnTo>
+                  <a:lnTo>
+                    <a:pt x="1289205" y="1768713"/>
+                  </a:lnTo>
+                  <a:lnTo>
+                    <a:pt x="1217582" y="1761908"/>
+                  </a:lnTo>
+                  <a:lnTo>
+                    <a:pt x="1145960" y="1755056"/>
+                  </a:lnTo>
+                  <a:lnTo>
+                    <a:pt x="1074337" y="1748156"/>
+                  </a:lnTo>
+                  <a:lnTo>
+                    <a:pt x="1002715" y="1741208"/>
+                  </a:lnTo>
+                  <a:lnTo>
+                    <a:pt x="931092" y="1734212"/>
+                  </a:lnTo>
+                  <a:lnTo>
+                    <a:pt x="859470" y="1727167"/>
+                  </a:lnTo>
+                  <a:lnTo>
+                    <a:pt x="787847" y="1720074"/>
+                  </a:lnTo>
+                  <a:lnTo>
+                    <a:pt x="716225" y="1712931"/>
+                  </a:lnTo>
+                  <a:lnTo>
+                    <a:pt x="644602" y="1705739"/>
+                  </a:lnTo>
+                  <a:lnTo>
+                    <a:pt x="572980" y="1698497"/>
+                  </a:lnTo>
+                  <a:lnTo>
+                    <a:pt x="501357" y="1691205"/>
+                  </a:lnTo>
+                  <a:lnTo>
+                    <a:pt x="429735" y="1683862"/>
+                  </a:lnTo>
+                  <a:lnTo>
+                    <a:pt x="358112" y="1676468"/>
+                  </a:lnTo>
+                  <a:lnTo>
+                    <a:pt x="286490" y="1669023"/>
+                  </a:lnTo>
+                  <a:lnTo>
+                    <a:pt x="214867" y="1661527"/>
+                  </a:lnTo>
+                  <a:lnTo>
+                    <a:pt x="143245" y="1653978"/>
+                  </a:lnTo>
+                  <a:lnTo>
+                    <a:pt x="71622" y="1646377"/>
+                  </a:lnTo>
+                  <a:lnTo>
+                    <a:pt x="0" y="1638724"/>
                   </a:lnTo>
                   <a:close/>
                 </a:path>
@@ -4020,312 +4020,312 @@
           </p:nvSpPr>
           <p:spPr>
             <a:xfrm>
-              <a:off x="1172049" y="2816889"/>
-              <a:ext cx="7090630" cy="2175519"/>
+              <a:off x="1172049" y="2807021"/>
+              <a:ext cx="7090630" cy="2189398"/>
             </a:xfrm>
             <a:custGeom>
               <a:avLst/>
               <a:pathLst>
-                <a:path w="7090630" h="2175519">
+                <a:path w="7090630" h="2189398">
                   <a:moveTo>
                     <a:pt x="0" y="0"/>
                   </a:moveTo>
                   <a:lnTo>
-                    <a:pt x="71622" y="76231"/>
-                  </a:lnTo>
-                  <a:lnTo>
-                    <a:pt x="143245" y="150341"/>
-                  </a:lnTo>
-                  <a:lnTo>
-                    <a:pt x="214867" y="222390"/>
-                  </a:lnTo>
-                  <a:lnTo>
-                    <a:pt x="286490" y="292435"/>
-                  </a:lnTo>
-                  <a:lnTo>
-                    <a:pt x="358112" y="360531"/>
-                  </a:lnTo>
-                  <a:lnTo>
-                    <a:pt x="429735" y="426733"/>
-                  </a:lnTo>
-                  <a:lnTo>
-                    <a:pt x="501357" y="491093"/>
-                  </a:lnTo>
-                  <a:lnTo>
-                    <a:pt x="572980" y="553663"/>
-                  </a:lnTo>
-                  <a:lnTo>
-                    <a:pt x="644602" y="614493"/>
-                  </a:lnTo>
-                  <a:lnTo>
-                    <a:pt x="716225" y="673630"/>
-                  </a:lnTo>
-                  <a:lnTo>
-                    <a:pt x="787847" y="731122"/>
-                  </a:lnTo>
-                  <a:lnTo>
-                    <a:pt x="859470" y="787015"/>
-                  </a:lnTo>
-                  <a:lnTo>
-                    <a:pt x="931092" y="841353"/>
-                  </a:lnTo>
-                  <a:lnTo>
-                    <a:pt x="1002715" y="894179"/>
-                  </a:lnTo>
-                  <a:lnTo>
-                    <a:pt x="1074337" y="945536"/>
-                  </a:lnTo>
-                  <a:lnTo>
-                    <a:pt x="1145960" y="995464"/>
-                  </a:lnTo>
-                  <a:lnTo>
-                    <a:pt x="1217582" y="1044004"/>
-                  </a:lnTo>
-                  <a:lnTo>
-                    <a:pt x="1289205" y="1091193"/>
-                  </a:lnTo>
-                  <a:lnTo>
-                    <a:pt x="1360827" y="1137069"/>
-                  </a:lnTo>
-                  <a:lnTo>
-                    <a:pt x="1432450" y="1181669"/>
-                  </a:lnTo>
-                  <a:lnTo>
-                    <a:pt x="1504073" y="1225029"/>
-                  </a:lnTo>
-                  <a:lnTo>
-                    <a:pt x="1575695" y="1267182"/>
-                  </a:lnTo>
-                  <a:lnTo>
-                    <a:pt x="1647318" y="1308163"/>
-                  </a:lnTo>
-                  <a:lnTo>
-                    <a:pt x="1718940" y="1348004"/>
-                  </a:lnTo>
-                  <a:lnTo>
-                    <a:pt x="1790563" y="1386736"/>
-                  </a:lnTo>
-                  <a:lnTo>
-                    <a:pt x="1862185" y="1424391"/>
-                  </a:lnTo>
-                  <a:lnTo>
-                    <a:pt x="1933808" y="1460999"/>
-                  </a:lnTo>
-                  <a:lnTo>
-                    <a:pt x="2005430" y="1496588"/>
-                  </a:lnTo>
-                  <a:lnTo>
-                    <a:pt x="2077053" y="1531187"/>
-                  </a:lnTo>
-                  <a:lnTo>
-                    <a:pt x="2148675" y="1564824"/>
-                  </a:lnTo>
-                  <a:lnTo>
-                    <a:pt x="2220298" y="1597525"/>
-                  </a:lnTo>
-                  <a:lnTo>
-                    <a:pt x="2291920" y="1629316"/>
-                  </a:lnTo>
-                  <a:lnTo>
-                    <a:pt x="2363543" y="1660223"/>
-                  </a:lnTo>
-                  <a:lnTo>
-                    <a:pt x="2435165" y="1690270"/>
-                  </a:lnTo>
-                  <a:lnTo>
-                    <a:pt x="2506788" y="1719482"/>
-                  </a:lnTo>
-                  <a:lnTo>
-                    <a:pt x="2578410" y="1747880"/>
-                  </a:lnTo>
-                  <a:lnTo>
-                    <a:pt x="2650033" y="1775489"/>
-                  </a:lnTo>
-                  <a:lnTo>
-                    <a:pt x="2721655" y="1802330"/>
-                  </a:lnTo>
-                  <a:lnTo>
-                    <a:pt x="2793278" y="1828424"/>
-                  </a:lnTo>
-                  <a:lnTo>
-                    <a:pt x="2864901" y="1853792"/>
-                  </a:lnTo>
-                  <a:lnTo>
-                    <a:pt x="2936523" y="1878454"/>
-                  </a:lnTo>
-                  <a:lnTo>
-                    <a:pt x="3008146" y="1902431"/>
-                  </a:lnTo>
-                  <a:lnTo>
-                    <a:pt x="3079768" y="1914490"/>
-                  </a:lnTo>
-                  <a:lnTo>
-                    <a:pt x="3151391" y="1920074"/>
-                  </a:lnTo>
-                  <a:lnTo>
-                    <a:pt x="3223013" y="1925620"/>
-                  </a:lnTo>
-                  <a:lnTo>
-                    <a:pt x="3294636" y="1931128"/>
-                  </a:lnTo>
-                  <a:lnTo>
-                    <a:pt x="3366258" y="1936599"/>
-                  </a:lnTo>
-                  <a:lnTo>
-                    <a:pt x="3437881" y="1942033"/>
-                  </a:lnTo>
-                  <a:lnTo>
-                    <a:pt x="3509503" y="1947431"/>
-                  </a:lnTo>
-                  <a:lnTo>
-                    <a:pt x="3581126" y="1952792"/>
-                  </a:lnTo>
-                  <a:lnTo>
-                    <a:pt x="3652748" y="1958116"/>
-                  </a:lnTo>
-                  <a:lnTo>
-                    <a:pt x="3724371" y="1963405"/>
-                  </a:lnTo>
-                  <a:lnTo>
-                    <a:pt x="3795993" y="1968658"/>
-                  </a:lnTo>
-                  <a:lnTo>
-                    <a:pt x="3867616" y="1973875"/>
-                  </a:lnTo>
-                  <a:lnTo>
-                    <a:pt x="3939238" y="1979057"/>
-                  </a:lnTo>
-                  <a:lnTo>
-                    <a:pt x="4010861" y="1984204"/>
-                  </a:lnTo>
-                  <a:lnTo>
-                    <a:pt x="4082483" y="1989316"/>
-                  </a:lnTo>
-                  <a:lnTo>
-                    <a:pt x="4154106" y="1994394"/>
-                  </a:lnTo>
-                  <a:lnTo>
-                    <a:pt x="4225729" y="1999437"/>
-                  </a:lnTo>
-                  <a:lnTo>
-                    <a:pt x="4297351" y="2004447"/>
-                  </a:lnTo>
-                  <a:lnTo>
-                    <a:pt x="4368974" y="2009422"/>
-                  </a:lnTo>
-                  <a:lnTo>
-                    <a:pt x="4440596" y="2014364"/>
-                  </a:lnTo>
-                  <a:lnTo>
-                    <a:pt x="4512219" y="2019272"/>
-                  </a:lnTo>
-                  <a:lnTo>
-                    <a:pt x="4583841" y="2024147"/>
-                  </a:lnTo>
-                  <a:lnTo>
-                    <a:pt x="4655464" y="2028990"/>
-                  </a:lnTo>
-                  <a:lnTo>
-                    <a:pt x="4727086" y="2033799"/>
-                  </a:lnTo>
-                  <a:lnTo>
-                    <a:pt x="4798709" y="2038576"/>
-                  </a:lnTo>
-                  <a:lnTo>
-                    <a:pt x="4870331" y="2043321"/>
-                  </a:lnTo>
-                  <a:lnTo>
-                    <a:pt x="4941954" y="2048033"/>
-                  </a:lnTo>
-                  <a:lnTo>
-                    <a:pt x="5013576" y="2052714"/>
-                  </a:lnTo>
-                  <a:lnTo>
-                    <a:pt x="5085199" y="2057363"/>
-                  </a:lnTo>
-                  <a:lnTo>
-                    <a:pt x="5156821" y="2061981"/>
-                  </a:lnTo>
-                  <a:lnTo>
-                    <a:pt x="5228444" y="2066567"/>
-                  </a:lnTo>
-                  <a:lnTo>
-                    <a:pt x="5300066" y="2071122"/>
-                  </a:lnTo>
-                  <a:lnTo>
-                    <a:pt x="5371689" y="2075647"/>
-                  </a:lnTo>
-                  <a:lnTo>
-                    <a:pt x="5443311" y="2080141"/>
-                  </a:lnTo>
-                  <a:lnTo>
-                    <a:pt x="5514934" y="2084605"/>
-                  </a:lnTo>
-                  <a:lnTo>
-                    <a:pt x="5586557" y="2089038"/>
-                  </a:lnTo>
-                  <a:lnTo>
-                    <a:pt x="5658179" y="2093442"/>
-                  </a:lnTo>
-                  <a:lnTo>
-                    <a:pt x="5729802" y="2097815"/>
-                  </a:lnTo>
-                  <a:lnTo>
-                    <a:pt x="5801424" y="2102159"/>
-                  </a:lnTo>
-                  <a:lnTo>
-                    <a:pt x="5873047" y="2106474"/>
-                  </a:lnTo>
-                  <a:lnTo>
-                    <a:pt x="5944669" y="2110760"/>
-                  </a:lnTo>
-                  <a:lnTo>
-                    <a:pt x="6016292" y="2115016"/>
-                  </a:lnTo>
-                  <a:lnTo>
-                    <a:pt x="6087914" y="2119244"/>
-                  </a:lnTo>
-                  <a:lnTo>
-                    <a:pt x="6159537" y="2123443"/>
-                  </a:lnTo>
-                  <a:lnTo>
-                    <a:pt x="6231159" y="2127614"/>
-                  </a:lnTo>
-                  <a:lnTo>
-                    <a:pt x="6302782" y="2131757"/>
-                  </a:lnTo>
-                  <a:lnTo>
-                    <a:pt x="6374404" y="2135872"/>
-                  </a:lnTo>
-                  <a:lnTo>
-                    <a:pt x="6446027" y="2139959"/>
-                  </a:lnTo>
-                  <a:lnTo>
-                    <a:pt x="6517649" y="2144018"/>
-                  </a:lnTo>
-                  <a:lnTo>
-                    <a:pt x="6589272" y="2148050"/>
-                  </a:lnTo>
-                  <a:lnTo>
-                    <a:pt x="6660894" y="2152054"/>
-                  </a:lnTo>
-                  <a:lnTo>
-                    <a:pt x="6732517" y="2156031"/>
-                  </a:lnTo>
-                  <a:lnTo>
-                    <a:pt x="6804139" y="2159982"/>
-                  </a:lnTo>
-                  <a:lnTo>
-                    <a:pt x="6875762" y="2163906"/>
-                  </a:lnTo>
-                  <a:lnTo>
-                    <a:pt x="6947385" y="2167803"/>
-                  </a:lnTo>
-                  <a:lnTo>
-                    <a:pt x="7019007" y="2171674"/>
-                  </a:lnTo>
-                  <a:lnTo>
-                    <a:pt x="7090630" y="2175519"/>
+                    <a:pt x="71622" y="76732"/>
+                  </a:lnTo>
+                  <a:lnTo>
+                    <a:pt x="143245" y="151324"/>
+                  </a:lnTo>
+                  <a:lnTo>
+                    <a:pt x="214867" y="223834"/>
+                  </a:lnTo>
+                  <a:lnTo>
+                    <a:pt x="286490" y="294322"/>
+                  </a:lnTo>
+                  <a:lnTo>
+                    <a:pt x="358112" y="362842"/>
+                  </a:lnTo>
+                  <a:lnTo>
+                    <a:pt x="429735" y="429451"/>
+                  </a:lnTo>
+                  <a:lnTo>
+                    <a:pt x="501357" y="494202"/>
+                  </a:lnTo>
+                  <a:lnTo>
+                    <a:pt x="572980" y="557146"/>
+                  </a:lnTo>
+                  <a:lnTo>
+                    <a:pt x="644602" y="618334"/>
+                  </a:lnTo>
+                  <a:lnTo>
+                    <a:pt x="716225" y="677815"/>
+                  </a:lnTo>
+                  <a:lnTo>
+                    <a:pt x="787847" y="735636"/>
+                  </a:lnTo>
+                  <a:lnTo>
+                    <a:pt x="859470" y="791844"/>
+                  </a:lnTo>
+                  <a:lnTo>
+                    <a:pt x="931092" y="846484"/>
+                  </a:lnTo>
+                  <a:lnTo>
+                    <a:pt x="1002715" y="899599"/>
+                  </a:lnTo>
+                  <a:lnTo>
+                    <a:pt x="1074337" y="951232"/>
+                  </a:lnTo>
+                  <a:lnTo>
+                    <a:pt x="1145960" y="1001425"/>
+                  </a:lnTo>
+                  <a:lnTo>
+                    <a:pt x="1217582" y="1050217"/>
+                  </a:lnTo>
+                  <a:lnTo>
+                    <a:pt x="1289205" y="1097648"/>
+                  </a:lnTo>
+                  <a:lnTo>
+                    <a:pt x="1360827" y="1143756"/>
+                  </a:lnTo>
+                  <a:lnTo>
+                    <a:pt x="1432450" y="1188577"/>
+                  </a:lnTo>
+                  <a:lnTo>
+                    <a:pt x="1504073" y="1232148"/>
+                  </a:lnTo>
+                  <a:lnTo>
+                    <a:pt x="1575695" y="1274503"/>
+                  </a:lnTo>
+                  <a:lnTo>
+                    <a:pt x="1647318" y="1315676"/>
+                  </a:lnTo>
+                  <a:lnTo>
+                    <a:pt x="1718940" y="1355701"/>
+                  </a:lnTo>
+                  <a:lnTo>
+                    <a:pt x="1790563" y="1394609"/>
+                  </a:lnTo>
+                  <a:lnTo>
+                    <a:pt x="1862185" y="1432431"/>
+                  </a:lnTo>
+                  <a:lnTo>
+                    <a:pt x="1933808" y="1469198"/>
+                  </a:lnTo>
+                  <a:lnTo>
+                    <a:pt x="2005430" y="1504939"/>
+                  </a:lnTo>
+                  <a:lnTo>
+                    <a:pt x="2077053" y="1539683"/>
+                  </a:lnTo>
+                  <a:lnTo>
+                    <a:pt x="2148675" y="1573458"/>
+                  </a:lnTo>
+                  <a:lnTo>
+                    <a:pt x="2220298" y="1606290"/>
+                  </a:lnTo>
+                  <a:lnTo>
+                    <a:pt x="2291920" y="1638207"/>
+                  </a:lnTo>
+                  <a:lnTo>
+                    <a:pt x="2363543" y="1669233"/>
+                  </a:lnTo>
+                  <a:lnTo>
+                    <a:pt x="2435165" y="1699393"/>
+                  </a:lnTo>
+                  <a:lnTo>
+                    <a:pt x="2506788" y="1728712"/>
+                  </a:lnTo>
+                  <a:lnTo>
+                    <a:pt x="2578410" y="1757212"/>
+                  </a:lnTo>
+                  <a:lnTo>
+                    <a:pt x="2650033" y="1784918"/>
+                  </a:lnTo>
+                  <a:lnTo>
+                    <a:pt x="2721655" y="1811850"/>
+                  </a:lnTo>
+                  <a:lnTo>
+                    <a:pt x="2793278" y="1838031"/>
+                  </a:lnTo>
+                  <a:lnTo>
+                    <a:pt x="2864901" y="1863482"/>
+                  </a:lnTo>
+                  <a:lnTo>
+                    <a:pt x="2936523" y="1888223"/>
+                  </a:lnTo>
+                  <a:lnTo>
+                    <a:pt x="3008146" y="1912273"/>
+                  </a:lnTo>
+                  <a:lnTo>
+                    <a:pt x="3079768" y="1924425"/>
+                  </a:lnTo>
+                  <a:lnTo>
+                    <a:pt x="3151391" y="1930111"/>
+                  </a:lnTo>
+                  <a:lnTo>
+                    <a:pt x="3223013" y="1935758"/>
+                  </a:lnTo>
+                  <a:lnTo>
+                    <a:pt x="3294636" y="1941366"/>
+                  </a:lnTo>
+                  <a:lnTo>
+                    <a:pt x="3366258" y="1946936"/>
+                  </a:lnTo>
+                  <a:lnTo>
+                    <a:pt x="3437881" y="1952467"/>
+                  </a:lnTo>
+                  <a:lnTo>
+                    <a:pt x="3509503" y="1957961"/>
+                  </a:lnTo>
+                  <a:lnTo>
+                    <a:pt x="3581126" y="1963416"/>
+                  </a:lnTo>
+                  <a:lnTo>
+                    <a:pt x="3652748" y="1968834"/>
+                  </a:lnTo>
+                  <a:lnTo>
+                    <a:pt x="3724371" y="1974214"/>
+                  </a:lnTo>
+                  <a:lnTo>
+                    <a:pt x="3795993" y="1979558"/>
+                  </a:lnTo>
+                  <a:lnTo>
+                    <a:pt x="3867616" y="1984864"/>
+                  </a:lnTo>
+                  <a:lnTo>
+                    <a:pt x="3939238" y="1990135"/>
+                  </a:lnTo>
+                  <a:lnTo>
+                    <a:pt x="4010861" y="1995368"/>
+                  </a:lnTo>
+                  <a:lnTo>
+                    <a:pt x="4082483" y="2000566"/>
+                  </a:lnTo>
+                  <a:lnTo>
+                    <a:pt x="4154106" y="2005728"/>
+                  </a:lnTo>
+                  <a:lnTo>
+                    <a:pt x="4225729" y="2010855"/>
+                  </a:lnTo>
+                  <a:lnTo>
+                    <a:pt x="4297351" y="2015946"/>
+                  </a:lnTo>
+                  <a:lnTo>
+                    <a:pt x="4368974" y="2021002"/>
+                  </a:lnTo>
+                  <a:lnTo>
+                    <a:pt x="4440596" y="2026023"/>
+                  </a:lnTo>
+                  <a:lnTo>
+                    <a:pt x="4512219" y="2031010"/>
+                  </a:lnTo>
+                  <a:lnTo>
+                    <a:pt x="4583841" y="2035962"/>
+                  </a:lnTo>
+                  <a:lnTo>
+                    <a:pt x="4655464" y="2040881"/>
+                  </a:lnTo>
+                  <a:lnTo>
+                    <a:pt x="4727086" y="2045765"/>
+                  </a:lnTo>
+                  <a:lnTo>
+                    <a:pt x="4798709" y="2050616"/>
+                  </a:lnTo>
+                  <a:lnTo>
+                    <a:pt x="4870331" y="2055433"/>
+                  </a:lnTo>
+                  <a:lnTo>
+                    <a:pt x="4941954" y="2060218"/>
+                  </a:lnTo>
+                  <a:lnTo>
+                    <a:pt x="5013576" y="2064969"/>
+                  </a:lnTo>
+                  <a:lnTo>
+                    <a:pt x="5085199" y="2069687"/>
+                  </a:lnTo>
+                  <a:lnTo>
+                    <a:pt x="5156821" y="2074373"/>
+                  </a:lnTo>
+                  <a:lnTo>
+                    <a:pt x="5228444" y="2079027"/>
+                  </a:lnTo>
+                  <a:lnTo>
+                    <a:pt x="5300066" y="2083649"/>
+                  </a:lnTo>
+                  <a:lnTo>
+                    <a:pt x="5371689" y="2088239"/>
+                  </a:lnTo>
+                  <a:lnTo>
+                    <a:pt x="5443311" y="2092797"/>
+                  </a:lnTo>
+                  <a:lnTo>
+                    <a:pt x="5514934" y="2097324"/>
+                  </a:lnTo>
+                  <a:lnTo>
+                    <a:pt x="5586557" y="2101820"/>
+                  </a:lnTo>
+                  <a:lnTo>
+                    <a:pt x="5658179" y="2106285"/>
+                  </a:lnTo>
+                  <a:lnTo>
+                    <a:pt x="5729802" y="2110719"/>
+                  </a:lnTo>
+                  <a:lnTo>
+                    <a:pt x="5801424" y="2115122"/>
+                  </a:lnTo>
+                  <a:lnTo>
+                    <a:pt x="5873047" y="2119495"/>
+                  </a:lnTo>
+                  <a:lnTo>
+                    <a:pt x="5944669" y="2123839"/>
+                  </a:lnTo>
+                  <a:lnTo>
+                    <a:pt x="6016292" y="2128152"/>
+                  </a:lnTo>
+                  <a:lnTo>
+                    <a:pt x="6087914" y="2132435"/>
+                  </a:lnTo>
+                  <a:lnTo>
+                    <a:pt x="6159537" y="2136689"/>
+                  </a:lnTo>
+                  <a:lnTo>
+                    <a:pt x="6231159" y="2140914"/>
+                  </a:lnTo>
+                  <a:lnTo>
+                    <a:pt x="6302782" y="2145110"/>
+                  </a:lnTo>
+                  <a:lnTo>
+                    <a:pt x="6374404" y="2149276"/>
+                  </a:lnTo>
+                  <a:lnTo>
+                    <a:pt x="6446027" y="2153414"/>
+                  </a:lnTo>
+                  <a:lnTo>
+                    <a:pt x="6517649" y="2157524"/>
+                  </a:lnTo>
+                  <a:lnTo>
+                    <a:pt x="6589272" y="2161605"/>
+                  </a:lnTo>
+                  <a:lnTo>
+                    <a:pt x="6660894" y="2165658"/>
+                  </a:lnTo>
+                  <a:lnTo>
+                    <a:pt x="6732517" y="2169683"/>
+                  </a:lnTo>
+                  <a:lnTo>
+                    <a:pt x="6804139" y="2173681"/>
+                  </a:lnTo>
+                  <a:lnTo>
+                    <a:pt x="6875762" y="2177651"/>
+                  </a:lnTo>
+                  <a:lnTo>
+                    <a:pt x="6947385" y="2181594"/>
+                  </a:lnTo>
+                  <a:lnTo>
+                    <a:pt x="7019007" y="2185509"/>
+                  </a:lnTo>
+                  <a:lnTo>
+                    <a:pt x="7090630" y="2189398"/>
                   </a:lnTo>
                 </a:path>
               </a:pathLst>
@@ -4345,309 +4345,309 @@
           </p:nvSpPr>
           <p:spPr>
             <a:xfrm>
-              <a:off x="1172049" y="4451653"/>
-              <a:ext cx="7090630" cy="937784"/>
+              <a:off x="1172049" y="4445745"/>
+              <a:ext cx="7090630" cy="944497"/>
             </a:xfrm>
             <a:custGeom>
               <a:avLst/>
               <a:pathLst>
-                <a:path w="7090630" h="937784">
+                <a:path w="7090630" h="944497">
                   <a:moveTo>
-                    <a:pt x="7090630" y="937784"/>
+                    <a:pt x="7090630" y="944497"/>
                   </a:moveTo>
                   <a:lnTo>
-                    <a:pt x="7019007" y="932983"/>
-                  </a:lnTo>
-                  <a:lnTo>
-                    <a:pt x="6947385" y="928044"/>
-                  </a:lnTo>
-                  <a:lnTo>
-                    <a:pt x="6875762" y="922963"/>
-                  </a:lnTo>
-                  <a:lnTo>
-                    <a:pt x="6804139" y="917737"/>
-                  </a:lnTo>
-                  <a:lnTo>
-                    <a:pt x="6732517" y="912362"/>
-                  </a:lnTo>
-                  <a:lnTo>
-                    <a:pt x="6660894" y="906833"/>
-                  </a:lnTo>
-                  <a:lnTo>
-                    <a:pt x="6589272" y="901145"/>
-                  </a:lnTo>
-                  <a:lnTo>
-                    <a:pt x="6517649" y="895295"/>
-                  </a:lnTo>
-                  <a:lnTo>
-                    <a:pt x="6446027" y="889278"/>
-                  </a:lnTo>
-                  <a:lnTo>
-                    <a:pt x="6374404" y="883088"/>
-                  </a:lnTo>
-                  <a:lnTo>
-                    <a:pt x="6302782" y="876721"/>
-                  </a:lnTo>
-                  <a:lnTo>
-                    <a:pt x="6231159" y="870172"/>
-                  </a:lnTo>
-                  <a:lnTo>
-                    <a:pt x="6159537" y="863436"/>
-                  </a:lnTo>
-                  <a:lnTo>
-                    <a:pt x="6087914" y="856507"/>
-                  </a:lnTo>
-                  <a:lnTo>
-                    <a:pt x="6016292" y="849379"/>
-                  </a:lnTo>
-                  <a:lnTo>
-                    <a:pt x="5944669" y="842048"/>
-                  </a:lnTo>
-                  <a:lnTo>
-                    <a:pt x="5873047" y="834507"/>
-                  </a:lnTo>
-                  <a:lnTo>
-                    <a:pt x="5801424" y="826750"/>
-                  </a:lnTo>
-                  <a:lnTo>
-                    <a:pt x="5729802" y="818771"/>
-                  </a:lnTo>
-                  <a:lnTo>
-                    <a:pt x="5658179" y="810564"/>
-                  </a:lnTo>
-                  <a:lnTo>
-                    <a:pt x="5586557" y="802122"/>
-                  </a:lnTo>
-                  <a:lnTo>
-                    <a:pt x="5514934" y="793438"/>
-                  </a:lnTo>
-                  <a:lnTo>
-                    <a:pt x="5443311" y="784506"/>
-                  </a:lnTo>
-                  <a:lnTo>
-                    <a:pt x="5371689" y="775319"/>
-                  </a:lnTo>
-                  <a:lnTo>
-                    <a:pt x="5300066" y="765868"/>
-                  </a:lnTo>
-                  <a:lnTo>
-                    <a:pt x="5228444" y="756147"/>
-                  </a:lnTo>
-                  <a:lnTo>
-                    <a:pt x="5156821" y="746148"/>
-                  </a:lnTo>
-                  <a:lnTo>
-                    <a:pt x="5085199" y="735863"/>
-                  </a:lnTo>
-                  <a:lnTo>
-                    <a:pt x="5013576" y="725283"/>
-                  </a:lnTo>
-                  <a:lnTo>
-                    <a:pt x="4941954" y="714401"/>
-                  </a:lnTo>
-                  <a:lnTo>
-                    <a:pt x="4870331" y="703208"/>
-                  </a:lnTo>
-                  <a:lnTo>
-                    <a:pt x="4798709" y="691694"/>
-                  </a:lnTo>
-                  <a:lnTo>
-                    <a:pt x="4727086" y="679850"/>
-                  </a:lnTo>
-                  <a:lnTo>
-                    <a:pt x="4655464" y="667668"/>
-                  </a:lnTo>
-                  <a:lnTo>
-                    <a:pt x="4583841" y="655137"/>
-                  </a:lnTo>
-                  <a:lnTo>
-                    <a:pt x="4512219" y="642248"/>
-                  </a:lnTo>
-                  <a:lnTo>
-                    <a:pt x="4440596" y="628990"/>
-                  </a:lnTo>
-                  <a:lnTo>
-                    <a:pt x="4368974" y="615352"/>
-                  </a:lnTo>
-                  <a:lnTo>
-                    <a:pt x="4297351" y="601324"/>
-                  </a:lnTo>
-                  <a:lnTo>
-                    <a:pt x="4225729" y="586895"/>
-                  </a:lnTo>
-                  <a:lnTo>
-                    <a:pt x="4154106" y="572053"/>
-                  </a:lnTo>
-                  <a:lnTo>
-                    <a:pt x="4082483" y="556786"/>
-                  </a:lnTo>
-                  <a:lnTo>
-                    <a:pt x="4010861" y="541083"/>
-                  </a:lnTo>
-                  <a:lnTo>
-                    <a:pt x="3939238" y="524930"/>
-                  </a:lnTo>
-                  <a:lnTo>
-                    <a:pt x="3867616" y="508315"/>
-                  </a:lnTo>
-                  <a:lnTo>
-                    <a:pt x="3795993" y="491224"/>
-                  </a:lnTo>
-                  <a:lnTo>
-                    <a:pt x="3724371" y="473645"/>
-                  </a:lnTo>
-                  <a:lnTo>
-                    <a:pt x="3652748" y="455562"/>
-                  </a:lnTo>
-                  <a:lnTo>
-                    <a:pt x="3581126" y="436962"/>
-                  </a:lnTo>
-                  <a:lnTo>
-                    <a:pt x="3509503" y="417830"/>
-                  </a:lnTo>
-                  <a:lnTo>
-                    <a:pt x="3437881" y="398150"/>
-                  </a:lnTo>
-                  <a:lnTo>
-                    <a:pt x="3366258" y="377907"/>
-                  </a:lnTo>
-                  <a:lnTo>
-                    <a:pt x="3294636" y="357085"/>
-                  </a:lnTo>
-                  <a:lnTo>
-                    <a:pt x="3223013" y="335668"/>
-                  </a:lnTo>
-                  <a:lnTo>
-                    <a:pt x="3151391" y="313637"/>
-                  </a:lnTo>
-                  <a:lnTo>
-                    <a:pt x="3079768" y="290976"/>
-                  </a:lnTo>
-                  <a:lnTo>
-                    <a:pt x="3008146" y="274104"/>
-                  </a:lnTo>
-                  <a:lnTo>
-                    <a:pt x="2936523" y="268445"/>
-                  </a:lnTo>
-                  <a:lnTo>
-                    <a:pt x="2864901" y="262746"/>
-                  </a:lnTo>
-                  <a:lnTo>
-                    <a:pt x="2793278" y="257009"/>
-                  </a:lnTo>
-                  <a:lnTo>
-                    <a:pt x="2721655" y="251233"/>
-                  </a:lnTo>
-                  <a:lnTo>
-                    <a:pt x="2650033" y="245417"/>
-                  </a:lnTo>
-                  <a:lnTo>
-                    <a:pt x="2578410" y="239562"/>
-                  </a:lnTo>
-                  <a:lnTo>
-                    <a:pt x="2506788" y="233667"/>
-                  </a:lnTo>
-                  <a:lnTo>
-                    <a:pt x="2435165" y="227732"/>
-                  </a:lnTo>
-                  <a:lnTo>
-                    <a:pt x="2363543" y="221757"/>
-                  </a:lnTo>
-                  <a:lnTo>
-                    <a:pt x="2291920" y="215741"/>
-                  </a:lnTo>
-                  <a:lnTo>
-                    <a:pt x="2220298" y="209683"/>
-                  </a:lnTo>
-                  <a:lnTo>
-                    <a:pt x="2148675" y="203585"/>
-                  </a:lnTo>
-                  <a:lnTo>
-                    <a:pt x="2077053" y="197445"/>
-                  </a:lnTo>
-                  <a:lnTo>
-                    <a:pt x="2005430" y="191264"/>
-                  </a:lnTo>
-                  <a:lnTo>
-                    <a:pt x="1933808" y="185040"/>
-                  </a:lnTo>
-                  <a:lnTo>
-                    <a:pt x="1862185" y="178774"/>
-                  </a:lnTo>
-                  <a:lnTo>
-                    <a:pt x="1790563" y="172465"/>
-                  </a:lnTo>
-                  <a:lnTo>
-                    <a:pt x="1718940" y="166113"/>
-                  </a:lnTo>
-                  <a:lnTo>
-                    <a:pt x="1647318" y="159718"/>
-                  </a:lnTo>
-                  <a:lnTo>
-                    <a:pt x="1575695" y="153280"/>
-                  </a:lnTo>
-                  <a:lnTo>
-                    <a:pt x="1504073" y="146798"/>
-                  </a:lnTo>
-                  <a:lnTo>
-                    <a:pt x="1432450" y="140271"/>
-                  </a:lnTo>
-                  <a:lnTo>
-                    <a:pt x="1360827" y="133700"/>
-                  </a:lnTo>
-                  <a:lnTo>
-                    <a:pt x="1289205" y="127085"/>
-                  </a:lnTo>
-                  <a:lnTo>
-                    <a:pt x="1217582" y="120424"/>
-                  </a:lnTo>
-                  <a:lnTo>
-                    <a:pt x="1145960" y="113718"/>
-                  </a:lnTo>
-                  <a:lnTo>
-                    <a:pt x="1074337" y="106967"/>
-                  </a:lnTo>
-                  <a:lnTo>
-                    <a:pt x="1002715" y="100169"/>
-                  </a:lnTo>
-                  <a:lnTo>
-                    <a:pt x="931092" y="93326"/>
-                  </a:lnTo>
-                  <a:lnTo>
-                    <a:pt x="859470" y="86435"/>
-                  </a:lnTo>
-                  <a:lnTo>
-                    <a:pt x="787847" y="79498"/>
-                  </a:lnTo>
-                  <a:lnTo>
-                    <a:pt x="716225" y="72513"/>
-                  </a:lnTo>
-                  <a:lnTo>
-                    <a:pt x="644602" y="65481"/>
-                  </a:lnTo>
-                  <a:lnTo>
-                    <a:pt x="572980" y="58401"/>
-                  </a:lnTo>
-                  <a:lnTo>
-                    <a:pt x="501357" y="51273"/>
-                  </a:lnTo>
-                  <a:lnTo>
-                    <a:pt x="429735" y="44097"/>
-                  </a:lnTo>
-                  <a:lnTo>
-                    <a:pt x="358112" y="36871"/>
-                  </a:lnTo>
-                  <a:lnTo>
-                    <a:pt x="286490" y="29597"/>
-                  </a:lnTo>
-                  <a:lnTo>
-                    <a:pt x="214867" y="22272"/>
-                  </a:lnTo>
-                  <a:lnTo>
-                    <a:pt x="143245" y="14898"/>
-                  </a:lnTo>
-                  <a:lnTo>
-                    <a:pt x="71622" y="7474"/>
+                    <a:pt x="7019007" y="939704"/>
+                  </a:lnTo>
+                  <a:lnTo>
+                    <a:pt x="6947385" y="934773"/>
+                  </a:lnTo>
+                  <a:lnTo>
+                    <a:pt x="6875762" y="929701"/>
+                  </a:lnTo>
+                  <a:lnTo>
+                    <a:pt x="6804139" y="924483"/>
+                  </a:lnTo>
+                  <a:lnTo>
+                    <a:pt x="6732517" y="919115"/>
+                  </a:lnTo>
+                  <a:lnTo>
+                    <a:pt x="6660894" y="913593"/>
+                  </a:lnTo>
+                  <a:lnTo>
+                    <a:pt x="6589272" y="907913"/>
+                  </a:lnTo>
+                  <a:lnTo>
+                    <a:pt x="6517649" y="902070"/>
+                  </a:lnTo>
+                  <a:lnTo>
+                    <a:pt x="6446027" y="896059"/>
+                  </a:lnTo>
+                  <a:lnTo>
+                    <a:pt x="6374404" y="889875"/>
+                  </a:lnTo>
+                  <a:lnTo>
+                    <a:pt x="6302782" y="883514"/>
+                  </a:lnTo>
+                  <a:lnTo>
+                    <a:pt x="6231159" y="876970"/>
+                  </a:lnTo>
+                  <a:lnTo>
+                    <a:pt x="6159537" y="870239"/>
+                  </a:lnTo>
+                  <a:lnTo>
+                    <a:pt x="6087914" y="863314"/>
+                  </a:lnTo>
+                  <a:lnTo>
+                    <a:pt x="6016292" y="856191"/>
+                  </a:lnTo>
+                  <a:lnTo>
+                    <a:pt x="5944669" y="848863"/>
+                  </a:lnTo>
+                  <a:lnTo>
+                    <a:pt x="5873047" y="841325"/>
+                  </a:lnTo>
+                  <a:lnTo>
+                    <a:pt x="5801424" y="833571"/>
+                  </a:lnTo>
+                  <a:lnTo>
+                    <a:pt x="5729802" y="825594"/>
+                  </a:lnTo>
+                  <a:lnTo>
+                    <a:pt x="5658179" y="817388"/>
+                  </a:lnTo>
+                  <a:lnTo>
+                    <a:pt x="5586557" y="808946"/>
+                  </a:lnTo>
+                  <a:lnTo>
+                    <a:pt x="5514934" y="800263"/>
+                  </a:lnTo>
+                  <a:lnTo>
+                    <a:pt x="5443311" y="791330"/>
+                  </a:lnTo>
+                  <a:lnTo>
+                    <a:pt x="5371689" y="782140"/>
+                  </a:lnTo>
+                  <a:lnTo>
+                    <a:pt x="5300066" y="772687"/>
+                  </a:lnTo>
+                  <a:lnTo>
+                    <a:pt x="5228444" y="762963"/>
+                  </a:lnTo>
+                  <a:lnTo>
+                    <a:pt x="5156821" y="752959"/>
+                  </a:lnTo>
+                  <a:lnTo>
+                    <a:pt x="5085199" y="742668"/>
+                  </a:lnTo>
+                  <a:lnTo>
+                    <a:pt x="5013576" y="732082"/>
+                  </a:lnTo>
+                  <a:lnTo>
+                    <a:pt x="4941954" y="721193"/>
+                  </a:lnTo>
+                  <a:lnTo>
+                    <a:pt x="4870331" y="709990"/>
+                  </a:lnTo>
+                  <a:lnTo>
+                    <a:pt x="4798709" y="698466"/>
+                  </a:lnTo>
+                  <a:lnTo>
+                    <a:pt x="4727086" y="686612"/>
+                  </a:lnTo>
+                  <a:lnTo>
+                    <a:pt x="4655464" y="674417"/>
+                  </a:lnTo>
+                  <a:lnTo>
+                    <a:pt x="4583841" y="661872"/>
+                  </a:lnTo>
+                  <a:lnTo>
+                    <a:pt x="4512219" y="648967"/>
+                  </a:lnTo>
+                  <a:lnTo>
+                    <a:pt x="4440596" y="635691"/>
+                  </a:lnTo>
+                  <a:lnTo>
+                    <a:pt x="4368974" y="622035"/>
+                  </a:lnTo>
+                  <a:lnTo>
+                    <a:pt x="4297351" y="607987"/>
+                  </a:lnTo>
+                  <a:lnTo>
+                    <a:pt x="4225729" y="593535"/>
+                  </a:lnTo>
+                  <a:lnTo>
+                    <a:pt x="4154106" y="578669"/>
+                  </a:lnTo>
+                  <a:lnTo>
+                    <a:pt x="4082483" y="563376"/>
+                  </a:lnTo>
+                  <a:lnTo>
+                    <a:pt x="4010861" y="547644"/>
+                  </a:lnTo>
+                  <a:lnTo>
+                    <a:pt x="3939238" y="531460"/>
+                  </a:lnTo>
+                  <a:lnTo>
+                    <a:pt x="3867616" y="514813"/>
+                  </a:lnTo>
+                  <a:lnTo>
+                    <a:pt x="3795993" y="497687"/>
+                  </a:lnTo>
+                  <a:lnTo>
+                    <a:pt x="3724371" y="480069"/>
+                  </a:lnTo>
+                  <a:lnTo>
+                    <a:pt x="3652748" y="461947"/>
+                  </a:lnTo>
+                  <a:lnTo>
+                    <a:pt x="3581126" y="443303"/>
+                  </a:lnTo>
+                  <a:lnTo>
+                    <a:pt x="3509503" y="424125"/>
+                  </a:lnTo>
+                  <a:lnTo>
+                    <a:pt x="3437881" y="404397"/>
+                  </a:lnTo>
+                  <a:lnTo>
+                    <a:pt x="3366258" y="384102"/>
+                  </a:lnTo>
+                  <a:lnTo>
+                    <a:pt x="3294636" y="363225"/>
+                  </a:lnTo>
+                  <a:lnTo>
+                    <a:pt x="3223013" y="341748"/>
+                  </a:lnTo>
+                  <a:lnTo>
+                    <a:pt x="3151391" y="319655"/>
+                  </a:lnTo>
+                  <a:lnTo>
+                    <a:pt x="3079768" y="296928"/>
+                  </a:lnTo>
+                  <a:lnTo>
+                    <a:pt x="3008146" y="279975"/>
+                  </a:lnTo>
+                  <a:lnTo>
+                    <a:pt x="2936523" y="274210"/>
+                  </a:lnTo>
+                  <a:lnTo>
+                    <a:pt x="2864901" y="268404"/>
+                  </a:lnTo>
+                  <a:lnTo>
+                    <a:pt x="2793278" y="262558"/>
+                  </a:lnTo>
+                  <a:lnTo>
+                    <a:pt x="2721655" y="256672"/>
+                  </a:lnTo>
+                  <a:lnTo>
+                    <a:pt x="2650033" y="250745"/>
+                  </a:lnTo>
+                  <a:lnTo>
+                    <a:pt x="2578410" y="244777"/>
+                  </a:lnTo>
+                  <a:lnTo>
+                    <a:pt x="2506788" y="238768"/>
+                  </a:lnTo>
+                  <a:lnTo>
+                    <a:pt x="2435165" y="232717"/>
+                  </a:lnTo>
+                  <a:lnTo>
+                    <a:pt x="2363543" y="226623"/>
+                  </a:lnTo>
+                  <a:lnTo>
+                    <a:pt x="2291920" y="220488"/>
+                  </a:lnTo>
+                  <a:lnTo>
+                    <a:pt x="2220298" y="214310"/>
+                  </a:lnTo>
+                  <a:lnTo>
+                    <a:pt x="2148675" y="208089"/>
+                  </a:lnTo>
+                  <a:lnTo>
+                    <a:pt x="2077053" y="201826"/>
+                  </a:lnTo>
+                  <a:lnTo>
+                    <a:pt x="2005430" y="195518"/>
+                  </a:lnTo>
+                  <a:lnTo>
+                    <a:pt x="1933808" y="189167"/>
+                  </a:lnTo>
+                  <a:lnTo>
+                    <a:pt x="1862185" y="182772"/>
+                  </a:lnTo>
+                  <a:lnTo>
+                    <a:pt x="1790563" y="176333"/>
+                  </a:lnTo>
+                  <a:lnTo>
+                    <a:pt x="1718940" y="169849"/>
+                  </a:lnTo>
+                  <a:lnTo>
+                    <a:pt x="1647318" y="163320"/>
+                  </a:lnTo>
+                  <a:lnTo>
+                    <a:pt x="1575695" y="156746"/>
+                  </a:lnTo>
+                  <a:lnTo>
+                    <a:pt x="1504073" y="150126"/>
+                  </a:lnTo>
+                  <a:lnTo>
+                    <a:pt x="1432450" y="143460"/>
+                  </a:lnTo>
+                  <a:lnTo>
+                    <a:pt x="1360827" y="136748"/>
+                  </a:lnTo>
+                  <a:lnTo>
+                    <a:pt x="1289205" y="129989"/>
+                  </a:lnTo>
+                  <a:lnTo>
+                    <a:pt x="1217582" y="123184"/>
+                  </a:lnTo>
+                  <a:lnTo>
+                    <a:pt x="1145960" y="116332"/>
+                  </a:lnTo>
+                  <a:lnTo>
+                    <a:pt x="1074337" y="109431"/>
+                  </a:lnTo>
+                  <a:lnTo>
+                    <a:pt x="1002715" y="102484"/>
+                  </a:lnTo>
+                  <a:lnTo>
+                    <a:pt x="931092" y="95487"/>
+                  </a:lnTo>
+                  <a:lnTo>
+                    <a:pt x="859470" y="88443"/>
+                  </a:lnTo>
+                  <a:lnTo>
+                    <a:pt x="787847" y="81349"/>
+                  </a:lnTo>
+                  <a:lnTo>
+                    <a:pt x="716225" y="74207"/>
+                  </a:lnTo>
+                  <a:lnTo>
+                    <a:pt x="644602" y="67015"/>
+                  </a:lnTo>
+                  <a:lnTo>
+                    <a:pt x="572980" y="59773"/>
+                  </a:lnTo>
+                  <a:lnTo>
+                    <a:pt x="501357" y="52481"/>
+                  </a:lnTo>
+                  <a:lnTo>
+                    <a:pt x="429735" y="45138"/>
+                  </a:lnTo>
+                  <a:lnTo>
+                    <a:pt x="358112" y="37744"/>
+                  </a:lnTo>
+                  <a:lnTo>
+                    <a:pt x="286490" y="30299"/>
+                  </a:lnTo>
+                  <a:lnTo>
+                    <a:pt x="214867" y="22803"/>
+                  </a:lnTo>
+                  <a:lnTo>
+                    <a:pt x="143245" y="15254"/>
+                  </a:lnTo>
+                  <a:lnTo>
+                    <a:pt x="71622" y="7653"/>
                   </a:lnTo>
                   <a:lnTo>
                     <a:pt x="0" y="0"/>
@@ -4670,312 +4670,312 @@
           </p:nvSpPr>
           <p:spPr>
             <a:xfrm>
-              <a:off x="1172049" y="3816637"/>
-              <a:ext cx="7090630" cy="1432738"/>
+              <a:off x="1172049" y="3808853"/>
+              <a:ext cx="7090630" cy="1442353"/>
             </a:xfrm>
             <a:custGeom>
               <a:avLst/>
               <a:pathLst>
-                <a:path w="7090630" h="1432738">
+                <a:path w="7090630" h="1442353">
                   <a:moveTo>
                     <a:pt x="0" y="0"/>
                   </a:moveTo>
                   <a:lnTo>
-                    <a:pt x="71622" y="30192"/>
-                  </a:lnTo>
-                  <a:lnTo>
-                    <a:pt x="143245" y="59860"/>
-                  </a:lnTo>
-                  <a:lnTo>
-                    <a:pt x="214867" y="89014"/>
-                  </a:lnTo>
-                  <a:lnTo>
-                    <a:pt x="286490" y="117663"/>
-                  </a:lnTo>
-                  <a:lnTo>
-                    <a:pt x="358112" y="145814"/>
-                  </a:lnTo>
-                  <a:lnTo>
-                    <a:pt x="429735" y="173477"/>
-                  </a:lnTo>
-                  <a:lnTo>
-                    <a:pt x="501357" y="200660"/>
-                  </a:lnTo>
-                  <a:lnTo>
-                    <a:pt x="572980" y="227372"/>
-                  </a:lnTo>
-                  <a:lnTo>
-                    <a:pt x="644602" y="253620"/>
-                  </a:lnTo>
-                  <a:lnTo>
-                    <a:pt x="716225" y="279413"/>
-                  </a:lnTo>
-                  <a:lnTo>
-                    <a:pt x="787847" y="304759"/>
-                  </a:lnTo>
-                  <a:lnTo>
-                    <a:pt x="859470" y="329665"/>
-                  </a:lnTo>
-                  <a:lnTo>
-                    <a:pt x="931092" y="354139"/>
-                  </a:lnTo>
-                  <a:lnTo>
-                    <a:pt x="1002715" y="378188"/>
-                  </a:lnTo>
-                  <a:lnTo>
-                    <a:pt x="1074337" y="401820"/>
-                  </a:lnTo>
-                  <a:lnTo>
-                    <a:pt x="1145960" y="425043"/>
-                  </a:lnTo>
-                  <a:lnTo>
-                    <a:pt x="1217582" y="447862"/>
-                  </a:lnTo>
-                  <a:lnTo>
-                    <a:pt x="1289205" y="470286"/>
-                  </a:lnTo>
-                  <a:lnTo>
-                    <a:pt x="1360827" y="492321"/>
-                  </a:lnTo>
-                  <a:lnTo>
-                    <a:pt x="1432450" y="513974"/>
-                  </a:lnTo>
-                  <a:lnTo>
-                    <a:pt x="1504073" y="535251"/>
-                  </a:lnTo>
-                  <a:lnTo>
-                    <a:pt x="1575695" y="556159"/>
-                  </a:lnTo>
-                  <a:lnTo>
-                    <a:pt x="1647318" y="576704"/>
-                  </a:lnTo>
-                  <a:lnTo>
-                    <a:pt x="1718940" y="596893"/>
-                  </a:lnTo>
-                  <a:lnTo>
-                    <a:pt x="1790563" y="616731"/>
-                  </a:lnTo>
-                  <a:lnTo>
-                    <a:pt x="1862185" y="636226"/>
-                  </a:lnTo>
-                  <a:lnTo>
-                    <a:pt x="1933808" y="655382"/>
-                  </a:lnTo>
-                  <a:lnTo>
-                    <a:pt x="2005430" y="674207"/>
-                  </a:lnTo>
-                  <a:lnTo>
-                    <a:pt x="2077053" y="692704"/>
-                  </a:lnTo>
-                  <a:lnTo>
-                    <a:pt x="2148675" y="710881"/>
-                  </a:lnTo>
-                  <a:lnTo>
-                    <a:pt x="2220298" y="728742"/>
-                  </a:lnTo>
-                  <a:lnTo>
-                    <a:pt x="2291920" y="746294"/>
-                  </a:lnTo>
-                  <a:lnTo>
-                    <a:pt x="2363543" y="763541"/>
-                  </a:lnTo>
-                  <a:lnTo>
-                    <a:pt x="2435165" y="780489"/>
-                  </a:lnTo>
-                  <a:lnTo>
-                    <a:pt x="2506788" y="797144"/>
-                  </a:lnTo>
-                  <a:lnTo>
-                    <a:pt x="2578410" y="813509"/>
-                  </a:lnTo>
-                  <a:lnTo>
-                    <a:pt x="2650033" y="829590"/>
-                  </a:lnTo>
-                  <a:lnTo>
-                    <a:pt x="2721655" y="845392"/>
-                  </a:lnTo>
-                  <a:lnTo>
-                    <a:pt x="2793278" y="860921"/>
-                  </a:lnTo>
-                  <a:lnTo>
-                    <a:pt x="2864901" y="876180"/>
-                  </a:lnTo>
-                  <a:lnTo>
-                    <a:pt x="2936523" y="891174"/>
-                  </a:lnTo>
-                  <a:lnTo>
-                    <a:pt x="3008146" y="905908"/>
-                  </a:lnTo>
-                  <a:lnTo>
-                    <a:pt x="3079768" y="920387"/>
-                  </a:lnTo>
-                  <a:lnTo>
-                    <a:pt x="3151391" y="934614"/>
-                  </a:lnTo>
-                  <a:lnTo>
-                    <a:pt x="3223013" y="948595"/>
-                  </a:lnTo>
-                  <a:lnTo>
-                    <a:pt x="3294636" y="962333"/>
-                  </a:lnTo>
-                  <a:lnTo>
-                    <a:pt x="3366258" y="975833"/>
-                  </a:lnTo>
-                  <a:lnTo>
-                    <a:pt x="3437881" y="989098"/>
-                  </a:lnTo>
-                  <a:lnTo>
-                    <a:pt x="3509503" y="1002134"/>
-                  </a:lnTo>
-                  <a:lnTo>
-                    <a:pt x="3581126" y="1014944"/>
-                  </a:lnTo>
-                  <a:lnTo>
-                    <a:pt x="3652748" y="1027531"/>
-                  </a:lnTo>
-                  <a:lnTo>
-                    <a:pt x="3724371" y="1039900"/>
-                  </a:lnTo>
-                  <a:lnTo>
-                    <a:pt x="3795993" y="1052054"/>
-                  </a:lnTo>
-                  <a:lnTo>
-                    <a:pt x="3867616" y="1063998"/>
-                  </a:lnTo>
-                  <a:lnTo>
-                    <a:pt x="3939238" y="1075734"/>
-                  </a:lnTo>
-                  <a:lnTo>
-                    <a:pt x="4010861" y="1087267"/>
-                  </a:lnTo>
-                  <a:lnTo>
-                    <a:pt x="4082483" y="1098600"/>
-                  </a:lnTo>
-                  <a:lnTo>
-                    <a:pt x="4154106" y="1109736"/>
-                  </a:lnTo>
-                  <a:lnTo>
-                    <a:pt x="4225729" y="1120679"/>
-                  </a:lnTo>
-                  <a:lnTo>
-                    <a:pt x="4297351" y="1131432"/>
-                  </a:lnTo>
-                  <a:lnTo>
-                    <a:pt x="4368974" y="1141999"/>
-                  </a:lnTo>
-                  <a:lnTo>
-                    <a:pt x="4440596" y="1152382"/>
-                  </a:lnTo>
-                  <a:lnTo>
-                    <a:pt x="4512219" y="1162586"/>
-                  </a:lnTo>
-                  <a:lnTo>
-                    <a:pt x="4583841" y="1172612"/>
-                  </a:lnTo>
-                  <a:lnTo>
-                    <a:pt x="4655464" y="1182464"/>
-                  </a:lnTo>
-                  <a:lnTo>
-                    <a:pt x="4727086" y="1192146"/>
-                  </a:lnTo>
-                  <a:lnTo>
-                    <a:pt x="4798709" y="1201659"/>
-                  </a:lnTo>
-                  <a:lnTo>
-                    <a:pt x="4870331" y="1211008"/>
-                  </a:lnTo>
-                  <a:lnTo>
-                    <a:pt x="4941954" y="1220194"/>
-                  </a:lnTo>
-                  <a:lnTo>
-                    <a:pt x="5013576" y="1229221"/>
-                  </a:lnTo>
-                  <a:lnTo>
-                    <a:pt x="5085199" y="1238092"/>
-                  </a:lnTo>
-                  <a:lnTo>
-                    <a:pt x="5156821" y="1246809"/>
-                  </a:lnTo>
-                  <a:lnTo>
-                    <a:pt x="5228444" y="1255374"/>
-                  </a:lnTo>
-                  <a:lnTo>
-                    <a:pt x="5300066" y="1263791"/>
-                  </a:lnTo>
-                  <a:lnTo>
-                    <a:pt x="5371689" y="1272062"/>
-                  </a:lnTo>
-                  <a:lnTo>
-                    <a:pt x="5443311" y="1280189"/>
-                  </a:lnTo>
-                  <a:lnTo>
-                    <a:pt x="5514934" y="1288175"/>
-                  </a:lnTo>
-                  <a:lnTo>
-                    <a:pt x="5586557" y="1296023"/>
-                  </a:lnTo>
-                  <a:lnTo>
-                    <a:pt x="5658179" y="1303735"/>
-                  </a:lnTo>
-                  <a:lnTo>
-                    <a:pt x="5729802" y="1311313"/>
-                  </a:lnTo>
-                  <a:lnTo>
-                    <a:pt x="5801424" y="1318760"/>
-                  </a:lnTo>
-                  <a:lnTo>
-                    <a:pt x="5873047" y="1326077"/>
-                  </a:lnTo>
-                  <a:lnTo>
-                    <a:pt x="5944669" y="1333267"/>
-                  </a:lnTo>
-                  <a:lnTo>
-                    <a:pt x="6016292" y="1340333"/>
-                  </a:lnTo>
-                  <a:lnTo>
-                    <a:pt x="6087914" y="1347276"/>
-                  </a:lnTo>
-                  <a:lnTo>
-                    <a:pt x="6159537" y="1354099"/>
-                  </a:lnTo>
-                  <a:lnTo>
-                    <a:pt x="6231159" y="1360803"/>
-                  </a:lnTo>
-                  <a:lnTo>
-                    <a:pt x="6302782" y="1367391"/>
-                  </a:lnTo>
-                  <a:lnTo>
-                    <a:pt x="6374404" y="1373865"/>
-                  </a:lnTo>
-                  <a:lnTo>
-                    <a:pt x="6446027" y="1380227"/>
-                  </a:lnTo>
-                  <a:lnTo>
-                    <a:pt x="6517649" y="1386478"/>
-                  </a:lnTo>
-                  <a:lnTo>
-                    <a:pt x="6589272" y="1392621"/>
-                  </a:lnTo>
-                  <a:lnTo>
-                    <a:pt x="6660894" y="1398657"/>
-                  </a:lnTo>
-                  <a:lnTo>
-                    <a:pt x="6732517" y="1404588"/>
-                  </a:lnTo>
-                  <a:lnTo>
-                    <a:pt x="6804139" y="1410417"/>
-                  </a:lnTo>
-                  <a:lnTo>
-                    <a:pt x="6875762" y="1416144"/>
-                  </a:lnTo>
-                  <a:lnTo>
-                    <a:pt x="6947385" y="1421773"/>
-                  </a:lnTo>
-                  <a:lnTo>
-                    <a:pt x="7019007" y="1427303"/>
-                  </a:lnTo>
-                  <a:lnTo>
-                    <a:pt x="7090630" y="1432738"/>
+                    <a:pt x="71622" y="30508"/>
+                  </a:lnTo>
+                  <a:lnTo>
+                    <a:pt x="143245" y="60484"/>
+                  </a:lnTo>
+                  <a:lnTo>
+                    <a:pt x="214867" y="89937"/>
+                  </a:lnTo>
+                  <a:lnTo>
+                    <a:pt x="286490" y="118875"/>
+                  </a:lnTo>
+                  <a:lnTo>
+                    <a:pt x="358112" y="147309"/>
+                  </a:lnTo>
+                  <a:lnTo>
+                    <a:pt x="429735" y="175247"/>
+                  </a:lnTo>
+                  <a:lnTo>
+                    <a:pt x="501357" y="202698"/>
+                  </a:lnTo>
+                  <a:lnTo>
+                    <a:pt x="572980" y="229669"/>
+                  </a:lnTo>
+                  <a:lnTo>
+                    <a:pt x="644602" y="256170"/>
+                  </a:lnTo>
+                  <a:lnTo>
+                    <a:pt x="716225" y="282208"/>
+                  </a:lnTo>
+                  <a:lnTo>
+                    <a:pt x="787847" y="307792"/>
+                  </a:lnTo>
+                  <a:lnTo>
+                    <a:pt x="859470" y="332929"/>
+                  </a:lnTo>
+                  <a:lnTo>
+                    <a:pt x="931092" y="357628"/>
+                  </a:lnTo>
+                  <a:lnTo>
+                    <a:pt x="1002715" y="381896"/>
+                  </a:lnTo>
+                  <a:lnTo>
+                    <a:pt x="1074337" y="405741"/>
+                  </a:lnTo>
+                  <a:lnTo>
+                    <a:pt x="1145960" y="429169"/>
+                  </a:lnTo>
+                  <a:lnTo>
+                    <a:pt x="1217582" y="452189"/>
+                  </a:lnTo>
+                  <a:lnTo>
+                    <a:pt x="1289205" y="474806"/>
+                  </a:lnTo>
+                  <a:lnTo>
+                    <a:pt x="1360827" y="497030"/>
+                  </a:lnTo>
+                  <a:lnTo>
+                    <a:pt x="1432450" y="518865"/>
+                  </a:lnTo>
+                  <a:lnTo>
+                    <a:pt x="1504073" y="540320"/>
+                  </a:lnTo>
+                  <a:lnTo>
+                    <a:pt x="1575695" y="561400"/>
+                  </a:lnTo>
+                  <a:lnTo>
+                    <a:pt x="1647318" y="582112"/>
+                  </a:lnTo>
+                  <a:lnTo>
+                    <a:pt x="1718940" y="602463"/>
+                  </a:lnTo>
+                  <a:lnTo>
+                    <a:pt x="1790563" y="622458"/>
+                  </a:lnTo>
+                  <a:lnTo>
+                    <a:pt x="1862185" y="642105"/>
+                  </a:lnTo>
+                  <a:lnTo>
+                    <a:pt x="1933808" y="661409"/>
+                  </a:lnTo>
+                  <a:lnTo>
+                    <a:pt x="2005430" y="680376"/>
+                  </a:lnTo>
+                  <a:lnTo>
+                    <a:pt x="2077053" y="699012"/>
+                  </a:lnTo>
+                  <a:lnTo>
+                    <a:pt x="2148675" y="717323"/>
+                  </a:lnTo>
+                  <a:lnTo>
+                    <a:pt x="2220298" y="735315"/>
+                  </a:lnTo>
+                  <a:lnTo>
+                    <a:pt x="2291920" y="752993"/>
+                  </a:lnTo>
+                  <a:lnTo>
+                    <a:pt x="2363543" y="770362"/>
+                  </a:lnTo>
+                  <a:lnTo>
+                    <a:pt x="2435165" y="787428"/>
+                  </a:lnTo>
+                  <a:lnTo>
+                    <a:pt x="2506788" y="804196"/>
+                  </a:lnTo>
+                  <a:lnTo>
+                    <a:pt x="2578410" y="820671"/>
+                  </a:lnTo>
+                  <a:lnTo>
+                    <a:pt x="2650033" y="836860"/>
+                  </a:lnTo>
+                  <a:lnTo>
+                    <a:pt x="2721655" y="852765"/>
+                  </a:lnTo>
+                  <a:lnTo>
+                    <a:pt x="2793278" y="868393"/>
+                  </a:lnTo>
+                  <a:lnTo>
+                    <a:pt x="2864901" y="883749"/>
+                  </a:lnTo>
+                  <a:lnTo>
+                    <a:pt x="2936523" y="898836"/>
+                  </a:lnTo>
+                  <a:lnTo>
+                    <a:pt x="3008146" y="913660"/>
+                  </a:lnTo>
+                  <a:lnTo>
+                    <a:pt x="3079768" y="928226"/>
+                  </a:lnTo>
+                  <a:lnTo>
+                    <a:pt x="3151391" y="942537"/>
+                  </a:lnTo>
+                  <a:lnTo>
+                    <a:pt x="3223013" y="956599"/>
+                  </a:lnTo>
+                  <a:lnTo>
+                    <a:pt x="3294636" y="970415"/>
+                  </a:lnTo>
+                  <a:lnTo>
+                    <a:pt x="3366258" y="983991"/>
+                  </a:lnTo>
+                  <a:lnTo>
+                    <a:pt x="3437881" y="997329"/>
+                  </a:lnTo>
+                  <a:lnTo>
+                    <a:pt x="3509503" y="1010434"/>
+                  </a:lnTo>
+                  <a:lnTo>
+                    <a:pt x="3581126" y="1023311"/>
+                  </a:lnTo>
+                  <a:lnTo>
+                    <a:pt x="3652748" y="1035964"/>
+                  </a:lnTo>
+                  <a:lnTo>
+                    <a:pt x="3724371" y="1048395"/>
+                  </a:lnTo>
+                  <a:lnTo>
+                    <a:pt x="3795993" y="1060610"/>
+                  </a:lnTo>
+                  <a:lnTo>
+                    <a:pt x="3867616" y="1072611"/>
+                  </a:lnTo>
+                  <a:lnTo>
+                    <a:pt x="3939238" y="1084403"/>
+                  </a:lnTo>
+                  <a:lnTo>
+                    <a:pt x="4010861" y="1095989"/>
+                  </a:lnTo>
+                  <a:lnTo>
+                    <a:pt x="4082483" y="1107373"/>
+                  </a:lnTo>
+                  <a:lnTo>
+                    <a:pt x="4154106" y="1118559"/>
+                  </a:lnTo>
+                  <a:lnTo>
+                    <a:pt x="4225729" y="1129549"/>
+                  </a:lnTo>
+                  <a:lnTo>
+                    <a:pt x="4297351" y="1140347"/>
+                  </a:lnTo>
+                  <a:lnTo>
+                    <a:pt x="4368974" y="1150957"/>
+                  </a:lnTo>
+                  <a:lnTo>
+                    <a:pt x="4440596" y="1161382"/>
+                  </a:lnTo>
+                  <a:lnTo>
+                    <a:pt x="4512219" y="1171625"/>
+                  </a:lnTo>
+                  <a:lnTo>
+                    <a:pt x="4583841" y="1181689"/>
+                  </a:lnTo>
+                  <a:lnTo>
+                    <a:pt x="4655464" y="1191578"/>
+                  </a:lnTo>
+                  <a:lnTo>
+                    <a:pt x="4727086" y="1201294"/>
+                  </a:lnTo>
+                  <a:lnTo>
+                    <a:pt x="4798709" y="1210841"/>
+                  </a:lnTo>
+                  <a:lnTo>
+                    <a:pt x="4870331" y="1220221"/>
+                  </a:lnTo>
+                  <a:lnTo>
+                    <a:pt x="4941954" y="1229437"/>
+                  </a:lnTo>
+                  <a:lnTo>
+                    <a:pt x="5013576" y="1238492"/>
+                  </a:lnTo>
+                  <a:lnTo>
+                    <a:pt x="5085199" y="1247390"/>
+                  </a:lnTo>
+                  <a:lnTo>
+                    <a:pt x="5156821" y="1256132"/>
+                  </a:lnTo>
+                  <a:lnTo>
+                    <a:pt x="5228444" y="1264722"/>
+                  </a:lnTo>
+                  <a:lnTo>
+                    <a:pt x="5300066" y="1273161"/>
+                  </a:lnTo>
+                  <a:lnTo>
+                    <a:pt x="5371689" y="1281454"/>
+                  </a:lnTo>
+                  <a:lnTo>
+                    <a:pt x="5443311" y="1289602"/>
+                  </a:lnTo>
+                  <a:lnTo>
+                    <a:pt x="5514934" y="1297607"/>
+                  </a:lnTo>
+                  <a:lnTo>
+                    <a:pt x="5586557" y="1305473"/>
+                  </a:lnTo>
+                  <a:lnTo>
+                    <a:pt x="5658179" y="1313202"/>
+                  </a:lnTo>
+                  <a:lnTo>
+                    <a:pt x="5729802" y="1320796"/>
+                  </a:lnTo>
+                  <a:lnTo>
+                    <a:pt x="5801424" y="1328257"/>
+                  </a:lnTo>
+                  <a:lnTo>
+                    <a:pt x="5873047" y="1335588"/>
+                  </a:lnTo>
+                  <a:lnTo>
+                    <a:pt x="5944669" y="1342791"/>
+                  </a:lnTo>
+                  <a:lnTo>
+                    <a:pt x="6016292" y="1349869"/>
+                  </a:lnTo>
+                  <a:lnTo>
+                    <a:pt x="6087914" y="1356823"/>
+                  </a:lnTo>
+                  <a:lnTo>
+                    <a:pt x="6159537" y="1363656"/>
+                  </a:lnTo>
+                  <a:lnTo>
+                    <a:pt x="6231159" y="1370369"/>
+                  </a:lnTo>
+                  <a:lnTo>
+                    <a:pt x="6302782" y="1376965"/>
+                  </a:lnTo>
+                  <a:lnTo>
+                    <a:pt x="6374404" y="1383447"/>
+                  </a:lnTo>
+                  <a:lnTo>
+                    <a:pt x="6446027" y="1389815"/>
+                  </a:lnTo>
+                  <a:lnTo>
+                    <a:pt x="6517649" y="1396072"/>
+                  </a:lnTo>
+                  <a:lnTo>
+                    <a:pt x="6589272" y="1402219"/>
+                  </a:lnTo>
+                  <a:lnTo>
+                    <a:pt x="6660894" y="1408260"/>
+                  </a:lnTo>
+                  <a:lnTo>
+                    <a:pt x="6732517" y="1414195"/>
+                  </a:lnTo>
+                  <a:lnTo>
+                    <a:pt x="6804139" y="1420027"/>
+                  </a:lnTo>
+                  <a:lnTo>
+                    <a:pt x="6875762" y="1425757"/>
+                  </a:lnTo>
+                  <a:lnTo>
+                    <a:pt x="6947385" y="1431386"/>
+                  </a:lnTo>
+                  <a:lnTo>
+                    <a:pt x="7019007" y="1436918"/>
+                  </a:lnTo>
+                  <a:lnTo>
+                    <a:pt x="7090630" y="1442353"/>
                   </a:lnTo>
                 </a:path>
               </a:pathLst>
@@ -5945,7 +5945,7 @@
                   <a:latin typeface="Helvetica"/>
                   <a:cs typeface="Helvetica"/>
                 </a:rPr>
-                <a:t>subHR per 10 % decline: 1.24 (1.09-1.41), p_Bonf = 0.008 (n = 6)  |  per IQR decline (Δ = 27.5 %): 1.80 (1.26-2.58)  |  IQR: [-29.1, -1.6] %</a:t>
+                <a:t>subHR per 10 % decline: 1.24 (1.09-1.41), p_Bonf = 0.008 (n = 6)  |  per IQR decline (Δ = 27.5 %): 1.81 (1.26-2.59)  |  IQR: [-29.1, -1.6] %</a:t>
               </a:r>
             </a:p>
           </p:txBody>
